--- a/FACEE_Presentation.pptx
+++ b/FACEE_Presentation.pptx
@@ -8697,27 +8697,3699 @@
                   <a:srgbClr val="404040"/>
                 </a:solidFill>
               </a:rPr>
-              <a:t>Table 2: Gantt Chart</a:t>
-            </a:r>
-          </a:p>
-        </p:txBody>
-      </p:sp>
-      <p:sp>
-        <p:nvSpPr>
-          <p:cNvPr id="9" name="Rectangle 8"/>
+              <a:t>Table 2: Project Gantt Chart</a:t>
+            </a:r>
+          </a:p>
+        </p:txBody>
+      </p:sp>
+      <p:graphicFrame>
+        <p:nvGraphicFramePr>
+          <p:cNvPr id="9" name="Table 8"/>
+          <p:cNvGraphicFramePr>
+            <a:graphicFrameLocks noGrp="1"/>
+          </p:cNvGraphicFramePr>
+          <p:nvPr/>
+        </p:nvGraphicFramePr>
+        <p:xfrm>
+          <a:off x="274320" y="1298448"/>
+          <a:ext cx="8595360" cy="5027360"/>
+        </p:xfrm>
+        <a:graphic>
+          <a:graphicData uri="http://schemas.openxmlformats.org/drawingml/2006/table">
+            <a:tbl>
+              <a:tblPr firstRow="1" bandRow="1">
+                <a:tableStyleId>{5C22544A-7EE6-4342-B048-85BDC9FD1C3A}</a:tableStyleId>
+              </a:tblPr>
+              <a:tblGrid>
+                <a:gridCol w="1600200"/>
+                <a:gridCol w="1165860"/>
+                <a:gridCol w="1165860"/>
+                <a:gridCol w="1165860"/>
+                <a:gridCol w="1165860"/>
+                <a:gridCol w="1165860"/>
+                <a:gridCol w="1165860"/>
+              </a:tblGrid>
+              <a:tr h="457200">
+                <a:tc>
+                  <a:txBody>
+                    <a:bodyPr wrap="square"/>
+                    <a:lstStyle/>
+                    <a:p>
+                      <a:pPr algn="ctr"/>
+                      <a:r>
+                        <a:rPr b="1" sz="1000">
+                          <a:solidFill>
+                            <a:srgbClr val="000000"/>
+                          </a:solidFill>
+                        </a:rPr>
+                        <a:t>Activities</a:t>
+                      </a:r>
+                    </a:p>
+                  </a:txBody>
+                  <a:tcPr>
+                    <a:lnL w="12700">
+                      <a:solidFill>
+                        <a:srgbClr val="000000"/>
+                      </a:solidFill>
+                    </a:lnL>
+                    <a:lnR w="12700">
+                      <a:solidFill>
+                        <a:srgbClr val="000000"/>
+                      </a:solidFill>
+                    </a:lnR>
+                    <a:lnT w="12700">
+                      <a:solidFill>
+                        <a:srgbClr val="000000"/>
+                      </a:solidFill>
+                    </a:lnT>
+                    <a:lnB w="12700">
+                      <a:solidFill>
+                        <a:srgbClr val="000000"/>
+                      </a:solidFill>
+                    </a:lnB>
+                    <a:solidFill>
+                      <a:srgbClr val="FFFFFF"/>
+                    </a:solidFill>
+                  </a:tcPr>
+                </a:tc>
+                <a:tc>
+                  <a:txBody>
+                    <a:bodyPr wrap="square"/>
+                    <a:lstStyle/>
+                    <a:p>
+                      <a:pPr algn="ctr"/>
+                      <a:r>
+                        <a:rPr b="1" sz="1000">
+                          <a:solidFill>
+                            <a:srgbClr val="000000"/>
+                          </a:solidFill>
+                        </a:rPr>
+                        <a:t>28 Jan–</a:t>
+                      </a:r>
+                    </a:p>
+                    <a:p>
+                      <a:pPr algn="ctr"/>
+                      <a:r>
+                        <a:rPr b="1" sz="1000">
+                          <a:solidFill>
+                            <a:srgbClr val="000000"/>
+                          </a:solidFill>
+                        </a:rPr>
+                        <a:t>7 Feb</a:t>
+                      </a:r>
+                    </a:p>
+                  </a:txBody>
+                  <a:tcPr>
+                    <a:lnL w="12700">
+                      <a:solidFill>
+                        <a:srgbClr val="000000"/>
+                      </a:solidFill>
+                    </a:lnL>
+                    <a:lnR w="12700">
+                      <a:solidFill>
+                        <a:srgbClr val="000000"/>
+                      </a:solidFill>
+                    </a:lnR>
+                    <a:lnT w="12700">
+                      <a:solidFill>
+                        <a:srgbClr val="000000"/>
+                      </a:solidFill>
+                    </a:lnT>
+                    <a:lnB w="12700">
+                      <a:solidFill>
+                        <a:srgbClr val="000000"/>
+                      </a:solidFill>
+                    </a:lnB>
+                    <a:solidFill>
+                      <a:srgbClr val="FFFFFF"/>
+                    </a:solidFill>
+                  </a:tcPr>
+                </a:tc>
+                <a:tc>
+                  <a:txBody>
+                    <a:bodyPr wrap="square"/>
+                    <a:lstStyle/>
+                    <a:p>
+                      <a:pPr algn="ctr"/>
+                      <a:r>
+                        <a:rPr b="1" sz="1000">
+                          <a:solidFill>
+                            <a:srgbClr val="000000"/>
+                          </a:solidFill>
+                        </a:rPr>
+                        <a:t>8 Feb–</a:t>
+                      </a:r>
+                    </a:p>
+                    <a:p>
+                      <a:pPr algn="ctr"/>
+                      <a:r>
+                        <a:rPr b="1" sz="1000">
+                          <a:solidFill>
+                            <a:srgbClr val="000000"/>
+                          </a:solidFill>
+                        </a:rPr>
+                        <a:t>19 Mar</a:t>
+                      </a:r>
+                    </a:p>
+                  </a:txBody>
+                  <a:tcPr>
+                    <a:lnL w="12700">
+                      <a:solidFill>
+                        <a:srgbClr val="000000"/>
+                      </a:solidFill>
+                    </a:lnL>
+                    <a:lnR w="12700">
+                      <a:solidFill>
+                        <a:srgbClr val="000000"/>
+                      </a:solidFill>
+                    </a:lnR>
+                    <a:lnT w="12700">
+                      <a:solidFill>
+                        <a:srgbClr val="000000"/>
+                      </a:solidFill>
+                    </a:lnT>
+                    <a:lnB w="12700">
+                      <a:solidFill>
+                        <a:srgbClr val="000000"/>
+                      </a:solidFill>
+                    </a:lnB>
+                    <a:solidFill>
+                      <a:srgbClr val="FFFFFF"/>
+                    </a:solidFill>
+                  </a:tcPr>
+                </a:tc>
+                <a:tc>
+                  <a:txBody>
+                    <a:bodyPr wrap="square"/>
+                    <a:lstStyle/>
+                    <a:p>
+                      <a:pPr algn="ctr"/>
+                      <a:r>
+                        <a:rPr b="1" sz="1000">
+                          <a:solidFill>
+                            <a:srgbClr val="000000"/>
+                          </a:solidFill>
+                        </a:rPr>
+                        <a:t>20 Mar–</a:t>
+                      </a:r>
+                    </a:p>
+                    <a:p>
+                      <a:pPr algn="ctr"/>
+                      <a:r>
+                        <a:rPr b="1" sz="1000">
+                          <a:solidFill>
+                            <a:srgbClr val="000000"/>
+                          </a:solidFill>
+                        </a:rPr>
+                        <a:t>2 May</a:t>
+                      </a:r>
+                    </a:p>
+                  </a:txBody>
+                  <a:tcPr>
+                    <a:lnL w="12700">
+                      <a:solidFill>
+                        <a:srgbClr val="000000"/>
+                      </a:solidFill>
+                    </a:lnL>
+                    <a:lnR w="12700">
+                      <a:solidFill>
+                        <a:srgbClr val="000000"/>
+                      </a:solidFill>
+                    </a:lnR>
+                    <a:lnT w="12700">
+                      <a:solidFill>
+                        <a:srgbClr val="000000"/>
+                      </a:solidFill>
+                    </a:lnT>
+                    <a:lnB w="12700">
+                      <a:solidFill>
+                        <a:srgbClr val="000000"/>
+                      </a:solidFill>
+                    </a:lnB>
+                    <a:solidFill>
+                      <a:srgbClr val="FFFFFF"/>
+                    </a:solidFill>
+                  </a:tcPr>
+                </a:tc>
+                <a:tc>
+                  <a:txBody>
+                    <a:bodyPr wrap="square"/>
+                    <a:lstStyle/>
+                    <a:p>
+                      <a:pPr algn="ctr"/>
+                      <a:r>
+                        <a:rPr b="1" sz="1000">
+                          <a:solidFill>
+                            <a:srgbClr val="000000"/>
+                          </a:solidFill>
+                        </a:rPr>
+                        <a:t>3 May–</a:t>
+                      </a:r>
+                    </a:p>
+                    <a:p>
+                      <a:pPr algn="ctr"/>
+                      <a:r>
+                        <a:rPr b="1" sz="1000">
+                          <a:solidFill>
+                            <a:srgbClr val="000000"/>
+                          </a:solidFill>
+                        </a:rPr>
+                        <a:t>6 Jun</a:t>
+                      </a:r>
+                    </a:p>
+                  </a:txBody>
+                  <a:tcPr>
+                    <a:lnL w="12700">
+                      <a:solidFill>
+                        <a:srgbClr val="000000"/>
+                      </a:solidFill>
+                    </a:lnL>
+                    <a:lnR w="12700">
+                      <a:solidFill>
+                        <a:srgbClr val="000000"/>
+                      </a:solidFill>
+                    </a:lnR>
+                    <a:lnT w="12700">
+                      <a:solidFill>
+                        <a:srgbClr val="000000"/>
+                      </a:solidFill>
+                    </a:lnT>
+                    <a:lnB w="12700">
+                      <a:solidFill>
+                        <a:srgbClr val="000000"/>
+                      </a:solidFill>
+                    </a:lnB>
+                    <a:solidFill>
+                      <a:srgbClr val="FFFFFF"/>
+                    </a:solidFill>
+                  </a:tcPr>
+                </a:tc>
+                <a:tc>
+                  <a:txBody>
+                    <a:bodyPr wrap="square"/>
+                    <a:lstStyle/>
+                    <a:p>
+                      <a:pPr algn="ctr"/>
+                      <a:r>
+                        <a:rPr b="1" sz="1000">
+                          <a:solidFill>
+                            <a:srgbClr val="000000"/>
+                          </a:solidFill>
+                        </a:rPr>
+                        <a:t>7 Jun–</a:t>
+                      </a:r>
+                    </a:p>
+                    <a:p>
+                      <a:pPr algn="ctr"/>
+                      <a:r>
+                        <a:rPr b="1" sz="1000">
+                          <a:solidFill>
+                            <a:srgbClr val="000000"/>
+                          </a:solidFill>
+                        </a:rPr>
+                        <a:t>4 Jul</a:t>
+                      </a:r>
+                    </a:p>
+                  </a:txBody>
+                  <a:tcPr>
+                    <a:lnL w="12700">
+                      <a:solidFill>
+                        <a:srgbClr val="000000"/>
+                      </a:solidFill>
+                    </a:lnL>
+                    <a:lnR w="12700">
+                      <a:solidFill>
+                        <a:srgbClr val="000000"/>
+                      </a:solidFill>
+                    </a:lnR>
+                    <a:lnT w="12700">
+                      <a:solidFill>
+                        <a:srgbClr val="000000"/>
+                      </a:solidFill>
+                    </a:lnT>
+                    <a:lnB w="12700">
+                      <a:solidFill>
+                        <a:srgbClr val="000000"/>
+                      </a:solidFill>
+                    </a:lnB>
+                    <a:solidFill>
+                      <a:srgbClr val="FFFFFF"/>
+                    </a:solidFill>
+                  </a:tcPr>
+                </a:tc>
+                <a:tc>
+                  <a:txBody>
+                    <a:bodyPr wrap="square"/>
+                    <a:lstStyle/>
+                    <a:p>
+                      <a:pPr algn="ctr"/>
+                      <a:r>
+                        <a:rPr b="1" sz="1000">
+                          <a:solidFill>
+                            <a:srgbClr val="000000"/>
+                          </a:solidFill>
+                        </a:rPr>
+                        <a:t>5 Jul–</a:t>
+                      </a:r>
+                    </a:p>
+                    <a:p>
+                      <a:pPr algn="ctr"/>
+                      <a:r>
+                        <a:rPr b="1" sz="1000">
+                          <a:solidFill>
+                            <a:srgbClr val="000000"/>
+                          </a:solidFill>
+                        </a:rPr>
+                        <a:t>10 Jul</a:t>
+                      </a:r>
+                    </a:p>
+                  </a:txBody>
+                  <a:tcPr>
+                    <a:lnL w="12700">
+                      <a:solidFill>
+                        <a:srgbClr val="000000"/>
+                      </a:solidFill>
+                    </a:lnL>
+                    <a:lnR w="12700">
+                      <a:solidFill>
+                        <a:srgbClr val="000000"/>
+                      </a:solidFill>
+                    </a:lnR>
+                    <a:lnT w="12700">
+                      <a:solidFill>
+                        <a:srgbClr val="000000"/>
+                      </a:solidFill>
+                    </a:lnT>
+                    <a:lnB w="12700">
+                      <a:solidFill>
+                        <a:srgbClr val="000000"/>
+                      </a:solidFill>
+                    </a:lnB>
+                    <a:solidFill>
+                      <a:srgbClr val="FFFFFF"/>
+                    </a:solidFill>
+                  </a:tcPr>
+                </a:tc>
+              </a:tr>
+              <a:tr h="326440">
+                <a:tc rowSpan="2">
+                  <a:txBody>
+                    <a:bodyPr wrap="square"/>
+                    <a:lstStyle/>
+                    <a:p>
+                      <a:pPr algn="l"/>
+                      <a:r>
+                        <a:rPr b="1" sz="1100">
+                          <a:solidFill>
+                            <a:srgbClr val="000000"/>
+                          </a:solidFill>
+                        </a:rPr>
+                        <a:t>Feasibility</a:t>
+                      </a:r>
+                    </a:p>
+                    <a:p>
+                      <a:pPr algn="l"/>
+                      <a:r>
+                        <a:rPr b="1" sz="1100">
+                          <a:solidFill>
+                            <a:srgbClr val="000000"/>
+                          </a:solidFill>
+                        </a:rPr>
+                        <a:t>Study</a:t>
+                      </a:r>
+                    </a:p>
+                  </a:txBody>
+                  <a:tcPr>
+                    <a:lnL w="12700">
+                      <a:solidFill>
+                        <a:srgbClr val="000000"/>
+                      </a:solidFill>
+                    </a:lnL>
+                    <a:lnR w="12700">
+                      <a:solidFill>
+                        <a:srgbClr val="000000"/>
+                      </a:solidFill>
+                    </a:lnR>
+                    <a:lnT w="12700">
+                      <a:solidFill>
+                        <a:srgbClr val="000000"/>
+                      </a:solidFill>
+                    </a:lnT>
+                    <a:lnB w="12700">
+                      <a:solidFill>
+                        <a:srgbClr val="000000"/>
+                      </a:solidFill>
+                    </a:lnB>
+                    <a:solidFill>
+                      <a:srgbClr val="FFFFFF"/>
+                    </a:solidFill>
+                  </a:tcPr>
+                </a:tc>
+                <a:tc>
+                  <a:txBody>
+                    <a:bodyPr/>
+                    <a:lstStyle/>
+                    <a:p/>
+                  </a:txBody>
+                  <a:tcPr>
+                    <a:lnL w="12700">
+                      <a:solidFill>
+                        <a:srgbClr val="000000"/>
+                      </a:solidFill>
+                    </a:lnL>
+                    <a:lnR w="12700">
+                      <a:solidFill>
+                        <a:srgbClr val="000000"/>
+                      </a:solidFill>
+                    </a:lnR>
+                    <a:lnT w="12700">
+                      <a:solidFill>
+                        <a:srgbClr val="000000"/>
+                      </a:solidFill>
+                    </a:lnT>
+                    <a:lnB w="12700">
+                      <a:solidFill>
+                        <a:srgbClr val="000000"/>
+                      </a:solidFill>
+                    </a:lnB>
+                    <a:solidFill>
+                      <a:srgbClr val="FF0000"/>
+                    </a:solidFill>
+                  </a:tcPr>
+                </a:tc>
+                <a:tc>
+                  <a:txBody>
+                    <a:bodyPr/>
+                    <a:lstStyle/>
+                    <a:p/>
+                  </a:txBody>
+                  <a:tcPr>
+                    <a:lnL w="12700">
+                      <a:solidFill>
+                        <a:srgbClr val="000000"/>
+                      </a:solidFill>
+                    </a:lnL>
+                    <a:lnR w="12700">
+                      <a:solidFill>
+                        <a:srgbClr val="000000"/>
+                      </a:solidFill>
+                    </a:lnR>
+                    <a:lnT w="12700">
+                      <a:solidFill>
+                        <a:srgbClr val="000000"/>
+                      </a:solidFill>
+                    </a:lnT>
+                    <a:lnB w="12700">
+                      <a:solidFill>
+                        <a:srgbClr val="000000"/>
+                      </a:solidFill>
+                    </a:lnB>
+                    <a:solidFill>
+                      <a:srgbClr val="FF0000"/>
+                    </a:solidFill>
+                  </a:tcPr>
+                </a:tc>
+                <a:tc>
+                  <a:txBody>
+                    <a:bodyPr/>
+                    <a:lstStyle/>
+                    <a:p/>
+                  </a:txBody>
+                  <a:tcPr>
+                    <a:lnL w="12700">
+                      <a:solidFill>
+                        <a:srgbClr val="000000"/>
+                      </a:solidFill>
+                    </a:lnL>
+                    <a:lnR w="12700">
+                      <a:solidFill>
+                        <a:srgbClr val="000000"/>
+                      </a:solidFill>
+                    </a:lnR>
+                    <a:lnT w="12700">
+                      <a:solidFill>
+                        <a:srgbClr val="000000"/>
+                      </a:solidFill>
+                    </a:lnT>
+                    <a:lnB w="12700">
+                      <a:solidFill>
+                        <a:srgbClr val="000000"/>
+                      </a:solidFill>
+                    </a:lnB>
+                    <a:solidFill>
+                      <a:srgbClr val="FFFFFF"/>
+                    </a:solidFill>
+                  </a:tcPr>
+                </a:tc>
+                <a:tc>
+                  <a:txBody>
+                    <a:bodyPr/>
+                    <a:lstStyle/>
+                    <a:p/>
+                  </a:txBody>
+                  <a:tcPr>
+                    <a:lnL w="12700">
+                      <a:solidFill>
+                        <a:srgbClr val="000000"/>
+                      </a:solidFill>
+                    </a:lnL>
+                    <a:lnR w="12700">
+                      <a:solidFill>
+                        <a:srgbClr val="000000"/>
+                      </a:solidFill>
+                    </a:lnR>
+                    <a:lnT w="12700">
+                      <a:solidFill>
+                        <a:srgbClr val="000000"/>
+                      </a:solidFill>
+                    </a:lnT>
+                    <a:lnB w="12700">
+                      <a:solidFill>
+                        <a:srgbClr val="000000"/>
+                      </a:solidFill>
+                    </a:lnB>
+                    <a:solidFill>
+                      <a:srgbClr val="FFFFFF"/>
+                    </a:solidFill>
+                  </a:tcPr>
+                </a:tc>
+                <a:tc>
+                  <a:txBody>
+                    <a:bodyPr/>
+                    <a:lstStyle/>
+                    <a:p/>
+                  </a:txBody>
+                  <a:tcPr>
+                    <a:lnL w="12700">
+                      <a:solidFill>
+                        <a:srgbClr val="000000"/>
+                      </a:solidFill>
+                    </a:lnL>
+                    <a:lnR w="12700">
+                      <a:solidFill>
+                        <a:srgbClr val="000000"/>
+                      </a:solidFill>
+                    </a:lnR>
+                    <a:lnT w="12700">
+                      <a:solidFill>
+                        <a:srgbClr val="000000"/>
+                      </a:solidFill>
+                    </a:lnT>
+                    <a:lnB w="12700">
+                      <a:solidFill>
+                        <a:srgbClr val="000000"/>
+                      </a:solidFill>
+                    </a:lnB>
+                    <a:solidFill>
+                      <a:srgbClr val="FFFFFF"/>
+                    </a:solidFill>
+                  </a:tcPr>
+                </a:tc>
+                <a:tc>
+                  <a:txBody>
+                    <a:bodyPr/>
+                    <a:lstStyle/>
+                    <a:p/>
+                  </a:txBody>
+                  <a:tcPr>
+                    <a:lnL w="12700">
+                      <a:solidFill>
+                        <a:srgbClr val="000000"/>
+                      </a:solidFill>
+                    </a:lnL>
+                    <a:lnR w="12700">
+                      <a:solidFill>
+                        <a:srgbClr val="000000"/>
+                      </a:solidFill>
+                    </a:lnR>
+                    <a:lnT w="12700">
+                      <a:solidFill>
+                        <a:srgbClr val="000000"/>
+                      </a:solidFill>
+                    </a:lnT>
+                    <a:lnB w="12700">
+                      <a:solidFill>
+                        <a:srgbClr val="000000"/>
+                      </a:solidFill>
+                    </a:lnB>
+                    <a:solidFill>
+                      <a:srgbClr val="FFFFFF"/>
+                    </a:solidFill>
+                  </a:tcPr>
+                </a:tc>
+              </a:tr>
+              <a:tr h="326440">
+                <a:tc vMerge="1">
+                  <a:txBody>
+                    <a:bodyPr/>
+                    <a:lstStyle/>
+                    <a:p/>
+                  </a:txBody>
+                  <a:tcPr>
+                    <a:lnL w="12700">
+                      <a:solidFill>
+                        <a:srgbClr val="000000"/>
+                      </a:solidFill>
+                    </a:lnL>
+                    <a:lnR w="12700">
+                      <a:solidFill>
+                        <a:srgbClr val="000000"/>
+                      </a:solidFill>
+                    </a:lnR>
+                    <a:lnT w="12700">
+                      <a:solidFill>
+                        <a:srgbClr val="000000"/>
+                      </a:solidFill>
+                    </a:lnT>
+                    <a:lnB w="12700">
+                      <a:solidFill>
+                        <a:srgbClr val="000000"/>
+                      </a:solidFill>
+                    </a:lnB>
+                  </a:tcPr>
+                </a:tc>
+                <a:tc>
+                  <a:txBody>
+                    <a:bodyPr/>
+                    <a:lstStyle/>
+                    <a:p/>
+                  </a:txBody>
+                  <a:tcPr>
+                    <a:lnL w="12700">
+                      <a:solidFill>
+                        <a:srgbClr val="000000"/>
+                      </a:solidFill>
+                    </a:lnL>
+                    <a:lnR w="12700">
+                      <a:solidFill>
+                        <a:srgbClr val="000000"/>
+                      </a:solidFill>
+                    </a:lnR>
+                    <a:lnT w="12700">
+                      <a:solidFill>
+                        <a:srgbClr val="000000"/>
+                      </a:solidFill>
+                    </a:lnT>
+                    <a:lnB w="12700">
+                      <a:solidFill>
+                        <a:srgbClr val="000000"/>
+                      </a:solidFill>
+                    </a:lnB>
+                    <a:solidFill>
+                      <a:srgbClr val="00B050"/>
+                    </a:solidFill>
+                  </a:tcPr>
+                </a:tc>
+                <a:tc>
+                  <a:txBody>
+                    <a:bodyPr/>
+                    <a:lstStyle/>
+                    <a:p/>
+                  </a:txBody>
+                  <a:tcPr>
+                    <a:lnL w="12700">
+                      <a:solidFill>
+                        <a:srgbClr val="000000"/>
+                      </a:solidFill>
+                    </a:lnL>
+                    <a:lnR w="12700">
+                      <a:solidFill>
+                        <a:srgbClr val="000000"/>
+                      </a:solidFill>
+                    </a:lnR>
+                    <a:lnT w="12700">
+                      <a:solidFill>
+                        <a:srgbClr val="000000"/>
+                      </a:solidFill>
+                    </a:lnT>
+                    <a:lnB w="12700">
+                      <a:solidFill>
+                        <a:srgbClr val="000000"/>
+                      </a:solidFill>
+                    </a:lnB>
+                    <a:solidFill>
+                      <a:srgbClr val="00B050"/>
+                    </a:solidFill>
+                  </a:tcPr>
+                </a:tc>
+                <a:tc>
+                  <a:txBody>
+                    <a:bodyPr/>
+                    <a:lstStyle/>
+                    <a:p/>
+                  </a:txBody>
+                  <a:tcPr>
+                    <a:lnL w="12700">
+                      <a:solidFill>
+                        <a:srgbClr val="000000"/>
+                      </a:solidFill>
+                    </a:lnL>
+                    <a:lnR w="12700">
+                      <a:solidFill>
+                        <a:srgbClr val="000000"/>
+                      </a:solidFill>
+                    </a:lnR>
+                    <a:lnT w="12700">
+                      <a:solidFill>
+                        <a:srgbClr val="000000"/>
+                      </a:solidFill>
+                    </a:lnT>
+                    <a:lnB w="12700">
+                      <a:solidFill>
+                        <a:srgbClr val="000000"/>
+                      </a:solidFill>
+                    </a:lnB>
+                    <a:solidFill>
+                      <a:srgbClr val="FFFFFF"/>
+                    </a:solidFill>
+                  </a:tcPr>
+                </a:tc>
+                <a:tc>
+                  <a:txBody>
+                    <a:bodyPr/>
+                    <a:lstStyle/>
+                    <a:p/>
+                  </a:txBody>
+                  <a:tcPr>
+                    <a:lnL w="12700">
+                      <a:solidFill>
+                        <a:srgbClr val="000000"/>
+                      </a:solidFill>
+                    </a:lnL>
+                    <a:lnR w="12700">
+                      <a:solidFill>
+                        <a:srgbClr val="000000"/>
+                      </a:solidFill>
+                    </a:lnR>
+                    <a:lnT w="12700">
+                      <a:solidFill>
+                        <a:srgbClr val="000000"/>
+                      </a:solidFill>
+                    </a:lnT>
+                    <a:lnB w="12700">
+                      <a:solidFill>
+                        <a:srgbClr val="000000"/>
+                      </a:solidFill>
+                    </a:lnB>
+                    <a:solidFill>
+                      <a:srgbClr val="FFFFFF"/>
+                    </a:solidFill>
+                  </a:tcPr>
+                </a:tc>
+                <a:tc>
+                  <a:txBody>
+                    <a:bodyPr/>
+                    <a:lstStyle/>
+                    <a:p/>
+                  </a:txBody>
+                  <a:tcPr>
+                    <a:lnL w="12700">
+                      <a:solidFill>
+                        <a:srgbClr val="000000"/>
+                      </a:solidFill>
+                    </a:lnL>
+                    <a:lnR w="12700">
+                      <a:solidFill>
+                        <a:srgbClr val="000000"/>
+                      </a:solidFill>
+                    </a:lnR>
+                    <a:lnT w="12700">
+                      <a:solidFill>
+                        <a:srgbClr val="000000"/>
+                      </a:solidFill>
+                    </a:lnT>
+                    <a:lnB w="12700">
+                      <a:solidFill>
+                        <a:srgbClr val="000000"/>
+                      </a:solidFill>
+                    </a:lnB>
+                    <a:solidFill>
+                      <a:srgbClr val="FFFFFF"/>
+                    </a:solidFill>
+                  </a:tcPr>
+                </a:tc>
+                <a:tc>
+                  <a:txBody>
+                    <a:bodyPr/>
+                    <a:lstStyle/>
+                    <a:p/>
+                  </a:txBody>
+                  <a:tcPr>
+                    <a:lnL w="12700">
+                      <a:solidFill>
+                        <a:srgbClr val="000000"/>
+                      </a:solidFill>
+                    </a:lnL>
+                    <a:lnR w="12700">
+                      <a:solidFill>
+                        <a:srgbClr val="000000"/>
+                      </a:solidFill>
+                    </a:lnR>
+                    <a:lnT w="12700">
+                      <a:solidFill>
+                        <a:srgbClr val="000000"/>
+                      </a:solidFill>
+                    </a:lnT>
+                    <a:lnB w="12700">
+                      <a:solidFill>
+                        <a:srgbClr val="000000"/>
+                      </a:solidFill>
+                    </a:lnB>
+                    <a:solidFill>
+                      <a:srgbClr val="FFFFFF"/>
+                    </a:solidFill>
+                  </a:tcPr>
+                </a:tc>
+              </a:tr>
+              <a:tr h="326440">
+                <a:tc rowSpan="2">
+                  <a:txBody>
+                    <a:bodyPr wrap="square"/>
+                    <a:lstStyle/>
+                    <a:p>
+                      <a:pPr algn="l"/>
+                      <a:r>
+                        <a:rPr b="1" sz="1100">
+                          <a:solidFill>
+                            <a:srgbClr val="000000"/>
+                          </a:solidFill>
+                        </a:rPr>
+                        <a:t>Literature</a:t>
+                      </a:r>
+                    </a:p>
+                    <a:p>
+                      <a:pPr algn="l"/>
+                      <a:r>
+                        <a:rPr b="1" sz="1100">
+                          <a:solidFill>
+                            <a:srgbClr val="000000"/>
+                          </a:solidFill>
+                        </a:rPr>
+                        <a:t>Survey</a:t>
+                      </a:r>
+                    </a:p>
+                  </a:txBody>
+                  <a:tcPr>
+                    <a:lnL w="12700">
+                      <a:solidFill>
+                        <a:srgbClr val="000000"/>
+                      </a:solidFill>
+                    </a:lnL>
+                    <a:lnR w="12700">
+                      <a:solidFill>
+                        <a:srgbClr val="000000"/>
+                      </a:solidFill>
+                    </a:lnR>
+                    <a:lnT w="12700">
+                      <a:solidFill>
+                        <a:srgbClr val="000000"/>
+                      </a:solidFill>
+                    </a:lnT>
+                    <a:lnB w="12700">
+                      <a:solidFill>
+                        <a:srgbClr val="000000"/>
+                      </a:solidFill>
+                    </a:lnB>
+                    <a:solidFill>
+                      <a:srgbClr val="FFFFFF"/>
+                    </a:solidFill>
+                  </a:tcPr>
+                </a:tc>
+                <a:tc>
+                  <a:txBody>
+                    <a:bodyPr/>
+                    <a:lstStyle/>
+                    <a:p/>
+                  </a:txBody>
+                  <a:tcPr>
+                    <a:lnL w="12700">
+                      <a:solidFill>
+                        <a:srgbClr val="000000"/>
+                      </a:solidFill>
+                    </a:lnL>
+                    <a:lnR w="12700">
+                      <a:solidFill>
+                        <a:srgbClr val="000000"/>
+                      </a:solidFill>
+                    </a:lnR>
+                    <a:lnT w="12700">
+                      <a:solidFill>
+                        <a:srgbClr val="000000"/>
+                      </a:solidFill>
+                    </a:lnT>
+                    <a:lnB w="12700">
+                      <a:solidFill>
+                        <a:srgbClr val="000000"/>
+                      </a:solidFill>
+                    </a:lnB>
+                    <a:solidFill>
+                      <a:srgbClr val="FF0000"/>
+                    </a:solidFill>
+                  </a:tcPr>
+                </a:tc>
+                <a:tc>
+                  <a:txBody>
+                    <a:bodyPr/>
+                    <a:lstStyle/>
+                    <a:p/>
+                  </a:txBody>
+                  <a:tcPr>
+                    <a:lnL w="12700">
+                      <a:solidFill>
+                        <a:srgbClr val="000000"/>
+                      </a:solidFill>
+                    </a:lnL>
+                    <a:lnR w="12700">
+                      <a:solidFill>
+                        <a:srgbClr val="000000"/>
+                      </a:solidFill>
+                    </a:lnR>
+                    <a:lnT w="12700">
+                      <a:solidFill>
+                        <a:srgbClr val="000000"/>
+                      </a:solidFill>
+                    </a:lnT>
+                    <a:lnB w="12700">
+                      <a:solidFill>
+                        <a:srgbClr val="000000"/>
+                      </a:solidFill>
+                    </a:lnB>
+                    <a:solidFill>
+                      <a:srgbClr val="FF0000"/>
+                    </a:solidFill>
+                  </a:tcPr>
+                </a:tc>
+                <a:tc>
+                  <a:txBody>
+                    <a:bodyPr/>
+                    <a:lstStyle/>
+                    <a:p/>
+                  </a:txBody>
+                  <a:tcPr>
+                    <a:lnL w="12700">
+                      <a:solidFill>
+                        <a:srgbClr val="000000"/>
+                      </a:solidFill>
+                    </a:lnL>
+                    <a:lnR w="12700">
+                      <a:solidFill>
+                        <a:srgbClr val="000000"/>
+                      </a:solidFill>
+                    </a:lnR>
+                    <a:lnT w="12700">
+                      <a:solidFill>
+                        <a:srgbClr val="000000"/>
+                      </a:solidFill>
+                    </a:lnT>
+                    <a:lnB w="12700">
+                      <a:solidFill>
+                        <a:srgbClr val="000000"/>
+                      </a:solidFill>
+                    </a:lnB>
+                    <a:solidFill>
+                      <a:srgbClr val="FFFFFF"/>
+                    </a:solidFill>
+                  </a:tcPr>
+                </a:tc>
+                <a:tc>
+                  <a:txBody>
+                    <a:bodyPr/>
+                    <a:lstStyle/>
+                    <a:p/>
+                  </a:txBody>
+                  <a:tcPr>
+                    <a:lnL w="12700">
+                      <a:solidFill>
+                        <a:srgbClr val="000000"/>
+                      </a:solidFill>
+                    </a:lnL>
+                    <a:lnR w="12700">
+                      <a:solidFill>
+                        <a:srgbClr val="000000"/>
+                      </a:solidFill>
+                    </a:lnR>
+                    <a:lnT w="12700">
+                      <a:solidFill>
+                        <a:srgbClr val="000000"/>
+                      </a:solidFill>
+                    </a:lnT>
+                    <a:lnB w="12700">
+                      <a:solidFill>
+                        <a:srgbClr val="000000"/>
+                      </a:solidFill>
+                    </a:lnB>
+                    <a:solidFill>
+                      <a:srgbClr val="FF0000"/>
+                    </a:solidFill>
+                  </a:tcPr>
+                </a:tc>
+                <a:tc>
+                  <a:txBody>
+                    <a:bodyPr/>
+                    <a:lstStyle/>
+                    <a:p/>
+                  </a:txBody>
+                  <a:tcPr>
+                    <a:lnL w="12700">
+                      <a:solidFill>
+                        <a:srgbClr val="000000"/>
+                      </a:solidFill>
+                    </a:lnL>
+                    <a:lnR w="12700">
+                      <a:solidFill>
+                        <a:srgbClr val="000000"/>
+                      </a:solidFill>
+                    </a:lnR>
+                    <a:lnT w="12700">
+                      <a:solidFill>
+                        <a:srgbClr val="000000"/>
+                      </a:solidFill>
+                    </a:lnT>
+                    <a:lnB w="12700">
+                      <a:solidFill>
+                        <a:srgbClr val="000000"/>
+                      </a:solidFill>
+                    </a:lnB>
+                    <a:solidFill>
+                      <a:srgbClr val="FF0000"/>
+                    </a:solidFill>
+                  </a:tcPr>
+                </a:tc>
+                <a:tc>
+                  <a:txBody>
+                    <a:bodyPr/>
+                    <a:lstStyle/>
+                    <a:p/>
+                  </a:txBody>
+                  <a:tcPr>
+                    <a:lnL w="12700">
+                      <a:solidFill>
+                        <a:srgbClr val="000000"/>
+                      </a:solidFill>
+                    </a:lnL>
+                    <a:lnR w="12700">
+                      <a:solidFill>
+                        <a:srgbClr val="000000"/>
+                      </a:solidFill>
+                    </a:lnR>
+                    <a:lnT w="12700">
+                      <a:solidFill>
+                        <a:srgbClr val="000000"/>
+                      </a:solidFill>
+                    </a:lnT>
+                    <a:lnB w="12700">
+                      <a:solidFill>
+                        <a:srgbClr val="000000"/>
+                      </a:solidFill>
+                    </a:lnB>
+                    <a:solidFill>
+                      <a:srgbClr val="FFFFFF"/>
+                    </a:solidFill>
+                  </a:tcPr>
+                </a:tc>
+              </a:tr>
+              <a:tr h="326440">
+                <a:tc vMerge="1">
+                  <a:txBody>
+                    <a:bodyPr/>
+                    <a:lstStyle/>
+                    <a:p/>
+                  </a:txBody>
+                  <a:tcPr>
+                    <a:lnL w="12700">
+                      <a:solidFill>
+                        <a:srgbClr val="000000"/>
+                      </a:solidFill>
+                    </a:lnL>
+                    <a:lnR w="12700">
+                      <a:solidFill>
+                        <a:srgbClr val="000000"/>
+                      </a:solidFill>
+                    </a:lnR>
+                    <a:lnT w="12700">
+                      <a:solidFill>
+                        <a:srgbClr val="000000"/>
+                      </a:solidFill>
+                    </a:lnT>
+                    <a:lnB w="12700">
+                      <a:solidFill>
+                        <a:srgbClr val="000000"/>
+                      </a:solidFill>
+                    </a:lnB>
+                  </a:tcPr>
+                </a:tc>
+                <a:tc>
+                  <a:txBody>
+                    <a:bodyPr/>
+                    <a:lstStyle/>
+                    <a:p/>
+                  </a:txBody>
+                  <a:tcPr>
+                    <a:lnL w="12700">
+                      <a:solidFill>
+                        <a:srgbClr val="000000"/>
+                      </a:solidFill>
+                    </a:lnL>
+                    <a:lnR w="12700">
+                      <a:solidFill>
+                        <a:srgbClr val="000000"/>
+                      </a:solidFill>
+                    </a:lnR>
+                    <a:lnT w="12700">
+                      <a:solidFill>
+                        <a:srgbClr val="000000"/>
+                      </a:solidFill>
+                    </a:lnT>
+                    <a:lnB w="12700">
+                      <a:solidFill>
+                        <a:srgbClr val="000000"/>
+                      </a:solidFill>
+                    </a:lnB>
+                    <a:solidFill>
+                      <a:srgbClr val="00B050"/>
+                    </a:solidFill>
+                  </a:tcPr>
+                </a:tc>
+                <a:tc>
+                  <a:txBody>
+                    <a:bodyPr/>
+                    <a:lstStyle/>
+                    <a:p/>
+                  </a:txBody>
+                  <a:tcPr>
+                    <a:lnL w="12700">
+                      <a:solidFill>
+                        <a:srgbClr val="000000"/>
+                      </a:solidFill>
+                    </a:lnL>
+                    <a:lnR w="12700">
+                      <a:solidFill>
+                        <a:srgbClr val="000000"/>
+                      </a:solidFill>
+                    </a:lnR>
+                    <a:lnT w="12700">
+                      <a:solidFill>
+                        <a:srgbClr val="000000"/>
+                      </a:solidFill>
+                    </a:lnT>
+                    <a:lnB w="12700">
+                      <a:solidFill>
+                        <a:srgbClr val="000000"/>
+                      </a:solidFill>
+                    </a:lnB>
+                    <a:solidFill>
+                      <a:srgbClr val="00B050"/>
+                    </a:solidFill>
+                  </a:tcPr>
+                </a:tc>
+                <a:tc>
+                  <a:txBody>
+                    <a:bodyPr/>
+                    <a:lstStyle/>
+                    <a:p/>
+                  </a:txBody>
+                  <a:tcPr>
+                    <a:lnL w="12700">
+                      <a:solidFill>
+                        <a:srgbClr val="000000"/>
+                      </a:solidFill>
+                    </a:lnL>
+                    <a:lnR w="12700">
+                      <a:solidFill>
+                        <a:srgbClr val="000000"/>
+                      </a:solidFill>
+                    </a:lnR>
+                    <a:lnT w="12700">
+                      <a:solidFill>
+                        <a:srgbClr val="000000"/>
+                      </a:solidFill>
+                    </a:lnT>
+                    <a:lnB w="12700">
+                      <a:solidFill>
+                        <a:srgbClr val="000000"/>
+                      </a:solidFill>
+                    </a:lnB>
+                    <a:solidFill>
+                      <a:srgbClr val="FFFFFF"/>
+                    </a:solidFill>
+                  </a:tcPr>
+                </a:tc>
+                <a:tc>
+                  <a:txBody>
+                    <a:bodyPr/>
+                    <a:lstStyle/>
+                    <a:p/>
+                  </a:txBody>
+                  <a:tcPr>
+                    <a:lnL w="12700">
+                      <a:solidFill>
+                        <a:srgbClr val="000000"/>
+                      </a:solidFill>
+                    </a:lnL>
+                    <a:lnR w="12700">
+                      <a:solidFill>
+                        <a:srgbClr val="000000"/>
+                      </a:solidFill>
+                    </a:lnR>
+                    <a:lnT w="12700">
+                      <a:solidFill>
+                        <a:srgbClr val="000000"/>
+                      </a:solidFill>
+                    </a:lnT>
+                    <a:lnB w="12700">
+                      <a:solidFill>
+                        <a:srgbClr val="000000"/>
+                      </a:solidFill>
+                    </a:lnB>
+                    <a:solidFill>
+                      <a:srgbClr val="FFFFFF"/>
+                    </a:solidFill>
+                  </a:tcPr>
+                </a:tc>
+                <a:tc>
+                  <a:txBody>
+                    <a:bodyPr/>
+                    <a:lstStyle/>
+                    <a:p/>
+                  </a:txBody>
+                  <a:tcPr>
+                    <a:lnL w="12700">
+                      <a:solidFill>
+                        <a:srgbClr val="000000"/>
+                      </a:solidFill>
+                    </a:lnL>
+                    <a:lnR w="12700">
+                      <a:solidFill>
+                        <a:srgbClr val="000000"/>
+                      </a:solidFill>
+                    </a:lnR>
+                    <a:lnT w="12700">
+                      <a:solidFill>
+                        <a:srgbClr val="000000"/>
+                      </a:solidFill>
+                    </a:lnT>
+                    <a:lnB w="12700">
+                      <a:solidFill>
+                        <a:srgbClr val="000000"/>
+                      </a:solidFill>
+                    </a:lnB>
+                    <a:solidFill>
+                      <a:srgbClr val="FFFFFF"/>
+                    </a:solidFill>
+                  </a:tcPr>
+                </a:tc>
+                <a:tc>
+                  <a:txBody>
+                    <a:bodyPr/>
+                    <a:lstStyle/>
+                    <a:p/>
+                  </a:txBody>
+                  <a:tcPr>
+                    <a:lnL w="12700">
+                      <a:solidFill>
+                        <a:srgbClr val="000000"/>
+                      </a:solidFill>
+                    </a:lnL>
+                    <a:lnR w="12700">
+                      <a:solidFill>
+                        <a:srgbClr val="000000"/>
+                      </a:solidFill>
+                    </a:lnR>
+                    <a:lnT w="12700">
+                      <a:solidFill>
+                        <a:srgbClr val="000000"/>
+                      </a:solidFill>
+                    </a:lnT>
+                    <a:lnB w="12700">
+                      <a:solidFill>
+                        <a:srgbClr val="000000"/>
+                      </a:solidFill>
+                    </a:lnB>
+                    <a:solidFill>
+                      <a:srgbClr val="FFFFFF"/>
+                    </a:solidFill>
+                  </a:tcPr>
+                </a:tc>
+              </a:tr>
+              <a:tr h="326440">
+                <a:tc rowSpan="2">
+                  <a:txBody>
+                    <a:bodyPr wrap="square"/>
+                    <a:lstStyle/>
+                    <a:p>
+                      <a:pPr algn="l"/>
+                      <a:r>
+                        <a:rPr b="1" sz="1100">
+                          <a:solidFill>
+                            <a:srgbClr val="000000"/>
+                          </a:solidFill>
+                        </a:rPr>
+                        <a:t>Interface</a:t>
+                      </a:r>
+                    </a:p>
+                    <a:p>
+                      <a:pPr algn="l"/>
+                      <a:r>
+                        <a:rPr b="1" sz="1100">
+                          <a:solidFill>
+                            <a:srgbClr val="000000"/>
+                          </a:solidFill>
+                        </a:rPr>
+                        <a:t>Design</a:t>
+                      </a:r>
+                    </a:p>
+                  </a:txBody>
+                  <a:tcPr>
+                    <a:lnL w="12700">
+                      <a:solidFill>
+                        <a:srgbClr val="000000"/>
+                      </a:solidFill>
+                    </a:lnL>
+                    <a:lnR w="12700">
+                      <a:solidFill>
+                        <a:srgbClr val="000000"/>
+                      </a:solidFill>
+                    </a:lnR>
+                    <a:lnT w="12700">
+                      <a:solidFill>
+                        <a:srgbClr val="000000"/>
+                      </a:solidFill>
+                    </a:lnT>
+                    <a:lnB w="12700">
+                      <a:solidFill>
+                        <a:srgbClr val="000000"/>
+                      </a:solidFill>
+                    </a:lnB>
+                    <a:solidFill>
+                      <a:srgbClr val="FFFFFF"/>
+                    </a:solidFill>
+                  </a:tcPr>
+                </a:tc>
+                <a:tc>
+                  <a:txBody>
+                    <a:bodyPr/>
+                    <a:lstStyle/>
+                    <a:p/>
+                  </a:txBody>
+                  <a:tcPr>
+                    <a:lnL w="12700">
+                      <a:solidFill>
+                        <a:srgbClr val="000000"/>
+                      </a:solidFill>
+                    </a:lnL>
+                    <a:lnR w="12700">
+                      <a:solidFill>
+                        <a:srgbClr val="000000"/>
+                      </a:solidFill>
+                    </a:lnR>
+                    <a:lnT w="12700">
+                      <a:solidFill>
+                        <a:srgbClr val="000000"/>
+                      </a:solidFill>
+                    </a:lnT>
+                    <a:lnB w="12700">
+                      <a:solidFill>
+                        <a:srgbClr val="000000"/>
+                      </a:solidFill>
+                    </a:lnB>
+                    <a:solidFill>
+                      <a:srgbClr val="FFFFFF"/>
+                    </a:solidFill>
+                  </a:tcPr>
+                </a:tc>
+                <a:tc>
+                  <a:txBody>
+                    <a:bodyPr/>
+                    <a:lstStyle/>
+                    <a:p/>
+                  </a:txBody>
+                  <a:tcPr>
+                    <a:lnL w="12700">
+                      <a:solidFill>
+                        <a:srgbClr val="000000"/>
+                      </a:solidFill>
+                    </a:lnL>
+                    <a:lnR w="12700">
+                      <a:solidFill>
+                        <a:srgbClr val="000000"/>
+                      </a:solidFill>
+                    </a:lnR>
+                    <a:lnT w="12700">
+                      <a:solidFill>
+                        <a:srgbClr val="000000"/>
+                      </a:solidFill>
+                    </a:lnT>
+                    <a:lnB w="12700">
+                      <a:solidFill>
+                        <a:srgbClr val="000000"/>
+                      </a:solidFill>
+                    </a:lnB>
+                    <a:solidFill>
+                      <a:srgbClr val="FF0000"/>
+                    </a:solidFill>
+                  </a:tcPr>
+                </a:tc>
+                <a:tc>
+                  <a:txBody>
+                    <a:bodyPr/>
+                    <a:lstStyle/>
+                    <a:p/>
+                  </a:txBody>
+                  <a:tcPr>
+                    <a:lnL w="12700">
+                      <a:solidFill>
+                        <a:srgbClr val="000000"/>
+                      </a:solidFill>
+                    </a:lnL>
+                    <a:lnR w="12700">
+                      <a:solidFill>
+                        <a:srgbClr val="000000"/>
+                      </a:solidFill>
+                    </a:lnR>
+                    <a:lnT w="12700">
+                      <a:solidFill>
+                        <a:srgbClr val="000000"/>
+                      </a:solidFill>
+                    </a:lnT>
+                    <a:lnB w="12700">
+                      <a:solidFill>
+                        <a:srgbClr val="000000"/>
+                      </a:solidFill>
+                    </a:lnB>
+                    <a:solidFill>
+                      <a:srgbClr val="FF0000"/>
+                    </a:solidFill>
+                  </a:tcPr>
+                </a:tc>
+                <a:tc>
+                  <a:txBody>
+                    <a:bodyPr/>
+                    <a:lstStyle/>
+                    <a:p/>
+                  </a:txBody>
+                  <a:tcPr>
+                    <a:lnL w="12700">
+                      <a:solidFill>
+                        <a:srgbClr val="000000"/>
+                      </a:solidFill>
+                    </a:lnL>
+                    <a:lnR w="12700">
+                      <a:solidFill>
+                        <a:srgbClr val="000000"/>
+                      </a:solidFill>
+                    </a:lnR>
+                    <a:lnT w="12700">
+                      <a:solidFill>
+                        <a:srgbClr val="000000"/>
+                      </a:solidFill>
+                    </a:lnT>
+                    <a:lnB w="12700">
+                      <a:solidFill>
+                        <a:srgbClr val="000000"/>
+                      </a:solidFill>
+                    </a:lnB>
+                    <a:solidFill>
+                      <a:srgbClr val="FFFFFF"/>
+                    </a:solidFill>
+                  </a:tcPr>
+                </a:tc>
+                <a:tc>
+                  <a:txBody>
+                    <a:bodyPr/>
+                    <a:lstStyle/>
+                    <a:p/>
+                  </a:txBody>
+                  <a:tcPr>
+                    <a:lnL w="12700">
+                      <a:solidFill>
+                        <a:srgbClr val="000000"/>
+                      </a:solidFill>
+                    </a:lnL>
+                    <a:lnR w="12700">
+                      <a:solidFill>
+                        <a:srgbClr val="000000"/>
+                      </a:solidFill>
+                    </a:lnR>
+                    <a:lnT w="12700">
+                      <a:solidFill>
+                        <a:srgbClr val="000000"/>
+                      </a:solidFill>
+                    </a:lnT>
+                    <a:lnB w="12700">
+                      <a:solidFill>
+                        <a:srgbClr val="000000"/>
+                      </a:solidFill>
+                    </a:lnB>
+                    <a:solidFill>
+                      <a:srgbClr val="FFFFFF"/>
+                    </a:solidFill>
+                  </a:tcPr>
+                </a:tc>
+                <a:tc>
+                  <a:txBody>
+                    <a:bodyPr/>
+                    <a:lstStyle/>
+                    <a:p/>
+                  </a:txBody>
+                  <a:tcPr>
+                    <a:lnL w="12700">
+                      <a:solidFill>
+                        <a:srgbClr val="000000"/>
+                      </a:solidFill>
+                    </a:lnL>
+                    <a:lnR w="12700">
+                      <a:solidFill>
+                        <a:srgbClr val="000000"/>
+                      </a:solidFill>
+                    </a:lnR>
+                    <a:lnT w="12700">
+                      <a:solidFill>
+                        <a:srgbClr val="000000"/>
+                      </a:solidFill>
+                    </a:lnT>
+                    <a:lnB w="12700">
+                      <a:solidFill>
+                        <a:srgbClr val="000000"/>
+                      </a:solidFill>
+                    </a:lnB>
+                    <a:solidFill>
+                      <a:srgbClr val="FFFFFF"/>
+                    </a:solidFill>
+                  </a:tcPr>
+                </a:tc>
+              </a:tr>
+              <a:tr h="326440">
+                <a:tc vMerge="1">
+                  <a:txBody>
+                    <a:bodyPr/>
+                    <a:lstStyle/>
+                    <a:p/>
+                  </a:txBody>
+                  <a:tcPr>
+                    <a:lnL w="12700">
+                      <a:solidFill>
+                        <a:srgbClr val="000000"/>
+                      </a:solidFill>
+                    </a:lnL>
+                    <a:lnR w="12700">
+                      <a:solidFill>
+                        <a:srgbClr val="000000"/>
+                      </a:solidFill>
+                    </a:lnR>
+                    <a:lnT w="12700">
+                      <a:solidFill>
+                        <a:srgbClr val="000000"/>
+                      </a:solidFill>
+                    </a:lnT>
+                    <a:lnB w="12700">
+                      <a:solidFill>
+                        <a:srgbClr val="000000"/>
+                      </a:solidFill>
+                    </a:lnB>
+                  </a:tcPr>
+                </a:tc>
+                <a:tc>
+                  <a:txBody>
+                    <a:bodyPr/>
+                    <a:lstStyle/>
+                    <a:p/>
+                  </a:txBody>
+                  <a:tcPr>
+                    <a:lnL w="12700">
+                      <a:solidFill>
+                        <a:srgbClr val="000000"/>
+                      </a:solidFill>
+                    </a:lnL>
+                    <a:lnR w="12700">
+                      <a:solidFill>
+                        <a:srgbClr val="000000"/>
+                      </a:solidFill>
+                    </a:lnR>
+                    <a:lnT w="12700">
+                      <a:solidFill>
+                        <a:srgbClr val="000000"/>
+                      </a:solidFill>
+                    </a:lnT>
+                    <a:lnB w="12700">
+                      <a:solidFill>
+                        <a:srgbClr val="000000"/>
+                      </a:solidFill>
+                    </a:lnB>
+                    <a:solidFill>
+                      <a:srgbClr val="FFFFFF"/>
+                    </a:solidFill>
+                  </a:tcPr>
+                </a:tc>
+                <a:tc>
+                  <a:txBody>
+                    <a:bodyPr/>
+                    <a:lstStyle/>
+                    <a:p/>
+                  </a:txBody>
+                  <a:tcPr>
+                    <a:lnL w="12700">
+                      <a:solidFill>
+                        <a:srgbClr val="000000"/>
+                      </a:solidFill>
+                    </a:lnL>
+                    <a:lnR w="12700">
+                      <a:solidFill>
+                        <a:srgbClr val="000000"/>
+                      </a:solidFill>
+                    </a:lnR>
+                    <a:lnT w="12700">
+                      <a:solidFill>
+                        <a:srgbClr val="000000"/>
+                      </a:solidFill>
+                    </a:lnT>
+                    <a:lnB w="12700">
+                      <a:solidFill>
+                        <a:srgbClr val="000000"/>
+                      </a:solidFill>
+                    </a:lnB>
+                    <a:solidFill>
+                      <a:srgbClr val="00B050"/>
+                    </a:solidFill>
+                  </a:tcPr>
+                </a:tc>
+                <a:tc>
+                  <a:txBody>
+                    <a:bodyPr/>
+                    <a:lstStyle/>
+                    <a:p/>
+                  </a:txBody>
+                  <a:tcPr>
+                    <a:lnL w="12700">
+                      <a:solidFill>
+                        <a:srgbClr val="000000"/>
+                      </a:solidFill>
+                    </a:lnL>
+                    <a:lnR w="12700">
+                      <a:solidFill>
+                        <a:srgbClr val="000000"/>
+                      </a:solidFill>
+                    </a:lnR>
+                    <a:lnT w="12700">
+                      <a:solidFill>
+                        <a:srgbClr val="000000"/>
+                      </a:solidFill>
+                    </a:lnT>
+                    <a:lnB w="12700">
+                      <a:solidFill>
+                        <a:srgbClr val="000000"/>
+                      </a:solidFill>
+                    </a:lnB>
+                    <a:solidFill>
+                      <a:srgbClr val="FFFFFF"/>
+                    </a:solidFill>
+                  </a:tcPr>
+                </a:tc>
+                <a:tc>
+                  <a:txBody>
+                    <a:bodyPr/>
+                    <a:lstStyle/>
+                    <a:p/>
+                  </a:txBody>
+                  <a:tcPr>
+                    <a:lnL w="12700">
+                      <a:solidFill>
+                        <a:srgbClr val="000000"/>
+                      </a:solidFill>
+                    </a:lnL>
+                    <a:lnR w="12700">
+                      <a:solidFill>
+                        <a:srgbClr val="000000"/>
+                      </a:solidFill>
+                    </a:lnR>
+                    <a:lnT w="12700">
+                      <a:solidFill>
+                        <a:srgbClr val="000000"/>
+                      </a:solidFill>
+                    </a:lnT>
+                    <a:lnB w="12700">
+                      <a:solidFill>
+                        <a:srgbClr val="000000"/>
+                      </a:solidFill>
+                    </a:lnB>
+                    <a:solidFill>
+                      <a:srgbClr val="FFFFFF"/>
+                    </a:solidFill>
+                  </a:tcPr>
+                </a:tc>
+                <a:tc>
+                  <a:txBody>
+                    <a:bodyPr/>
+                    <a:lstStyle/>
+                    <a:p/>
+                  </a:txBody>
+                  <a:tcPr>
+                    <a:lnL w="12700">
+                      <a:solidFill>
+                        <a:srgbClr val="000000"/>
+                      </a:solidFill>
+                    </a:lnL>
+                    <a:lnR w="12700">
+                      <a:solidFill>
+                        <a:srgbClr val="000000"/>
+                      </a:solidFill>
+                    </a:lnR>
+                    <a:lnT w="12700">
+                      <a:solidFill>
+                        <a:srgbClr val="000000"/>
+                      </a:solidFill>
+                    </a:lnT>
+                    <a:lnB w="12700">
+                      <a:solidFill>
+                        <a:srgbClr val="000000"/>
+                      </a:solidFill>
+                    </a:lnB>
+                    <a:solidFill>
+                      <a:srgbClr val="FFFFFF"/>
+                    </a:solidFill>
+                  </a:tcPr>
+                </a:tc>
+                <a:tc>
+                  <a:txBody>
+                    <a:bodyPr/>
+                    <a:lstStyle/>
+                    <a:p/>
+                  </a:txBody>
+                  <a:tcPr>
+                    <a:lnL w="12700">
+                      <a:solidFill>
+                        <a:srgbClr val="000000"/>
+                      </a:solidFill>
+                    </a:lnL>
+                    <a:lnR w="12700">
+                      <a:solidFill>
+                        <a:srgbClr val="000000"/>
+                      </a:solidFill>
+                    </a:lnR>
+                    <a:lnT w="12700">
+                      <a:solidFill>
+                        <a:srgbClr val="000000"/>
+                      </a:solidFill>
+                    </a:lnT>
+                    <a:lnB w="12700">
+                      <a:solidFill>
+                        <a:srgbClr val="000000"/>
+                      </a:solidFill>
+                    </a:lnB>
+                    <a:solidFill>
+                      <a:srgbClr val="FFFFFF"/>
+                    </a:solidFill>
+                  </a:tcPr>
+                </a:tc>
+              </a:tr>
+              <a:tr h="326440">
+                <a:tc rowSpan="2">
+                  <a:txBody>
+                    <a:bodyPr wrap="square"/>
+                    <a:lstStyle/>
+                    <a:p>
+                      <a:pPr algn="l"/>
+                      <a:r>
+                        <a:rPr b="1" sz="1100">
+                          <a:solidFill>
+                            <a:srgbClr val="000000"/>
+                          </a:solidFill>
+                        </a:rPr>
+                        <a:t>Database</a:t>
+                      </a:r>
+                    </a:p>
+                    <a:p>
+                      <a:pPr algn="l"/>
+                      <a:r>
+                        <a:rPr b="1" sz="1100">
+                          <a:solidFill>
+                            <a:srgbClr val="000000"/>
+                          </a:solidFill>
+                        </a:rPr>
+                        <a:t>Development</a:t>
+                      </a:r>
+                    </a:p>
+                  </a:txBody>
+                  <a:tcPr>
+                    <a:lnL w="12700">
+                      <a:solidFill>
+                        <a:srgbClr val="000000"/>
+                      </a:solidFill>
+                    </a:lnL>
+                    <a:lnR w="12700">
+                      <a:solidFill>
+                        <a:srgbClr val="000000"/>
+                      </a:solidFill>
+                    </a:lnR>
+                    <a:lnT w="12700">
+                      <a:solidFill>
+                        <a:srgbClr val="000000"/>
+                      </a:solidFill>
+                    </a:lnT>
+                    <a:lnB w="12700">
+                      <a:solidFill>
+                        <a:srgbClr val="000000"/>
+                      </a:solidFill>
+                    </a:lnB>
+                    <a:solidFill>
+                      <a:srgbClr val="FFFFFF"/>
+                    </a:solidFill>
+                  </a:tcPr>
+                </a:tc>
+                <a:tc>
+                  <a:txBody>
+                    <a:bodyPr/>
+                    <a:lstStyle/>
+                    <a:p/>
+                  </a:txBody>
+                  <a:tcPr>
+                    <a:lnL w="12700">
+                      <a:solidFill>
+                        <a:srgbClr val="000000"/>
+                      </a:solidFill>
+                    </a:lnL>
+                    <a:lnR w="12700">
+                      <a:solidFill>
+                        <a:srgbClr val="000000"/>
+                      </a:solidFill>
+                    </a:lnR>
+                    <a:lnT w="12700">
+                      <a:solidFill>
+                        <a:srgbClr val="000000"/>
+                      </a:solidFill>
+                    </a:lnT>
+                    <a:lnB w="12700">
+                      <a:solidFill>
+                        <a:srgbClr val="000000"/>
+                      </a:solidFill>
+                    </a:lnB>
+                    <a:solidFill>
+                      <a:srgbClr val="FFFFFF"/>
+                    </a:solidFill>
+                  </a:tcPr>
+                </a:tc>
+                <a:tc>
+                  <a:txBody>
+                    <a:bodyPr/>
+                    <a:lstStyle/>
+                    <a:p/>
+                  </a:txBody>
+                  <a:tcPr>
+                    <a:lnL w="12700">
+                      <a:solidFill>
+                        <a:srgbClr val="000000"/>
+                      </a:solidFill>
+                    </a:lnL>
+                    <a:lnR w="12700">
+                      <a:solidFill>
+                        <a:srgbClr val="000000"/>
+                      </a:solidFill>
+                    </a:lnR>
+                    <a:lnT w="12700">
+                      <a:solidFill>
+                        <a:srgbClr val="000000"/>
+                      </a:solidFill>
+                    </a:lnT>
+                    <a:lnB w="12700">
+                      <a:solidFill>
+                        <a:srgbClr val="000000"/>
+                      </a:solidFill>
+                    </a:lnB>
+                    <a:solidFill>
+                      <a:srgbClr val="FF0000"/>
+                    </a:solidFill>
+                  </a:tcPr>
+                </a:tc>
+                <a:tc>
+                  <a:txBody>
+                    <a:bodyPr/>
+                    <a:lstStyle/>
+                    <a:p/>
+                  </a:txBody>
+                  <a:tcPr>
+                    <a:lnL w="12700">
+                      <a:solidFill>
+                        <a:srgbClr val="000000"/>
+                      </a:solidFill>
+                    </a:lnL>
+                    <a:lnR w="12700">
+                      <a:solidFill>
+                        <a:srgbClr val="000000"/>
+                      </a:solidFill>
+                    </a:lnR>
+                    <a:lnT w="12700">
+                      <a:solidFill>
+                        <a:srgbClr val="000000"/>
+                      </a:solidFill>
+                    </a:lnT>
+                    <a:lnB w="12700">
+                      <a:solidFill>
+                        <a:srgbClr val="000000"/>
+                      </a:solidFill>
+                    </a:lnB>
+                    <a:solidFill>
+                      <a:srgbClr val="FF0000"/>
+                    </a:solidFill>
+                  </a:tcPr>
+                </a:tc>
+                <a:tc>
+                  <a:txBody>
+                    <a:bodyPr/>
+                    <a:lstStyle/>
+                    <a:p/>
+                  </a:txBody>
+                  <a:tcPr>
+                    <a:lnL w="12700">
+                      <a:solidFill>
+                        <a:srgbClr val="000000"/>
+                      </a:solidFill>
+                    </a:lnL>
+                    <a:lnR w="12700">
+                      <a:solidFill>
+                        <a:srgbClr val="000000"/>
+                      </a:solidFill>
+                    </a:lnR>
+                    <a:lnT w="12700">
+                      <a:solidFill>
+                        <a:srgbClr val="000000"/>
+                      </a:solidFill>
+                    </a:lnT>
+                    <a:lnB w="12700">
+                      <a:solidFill>
+                        <a:srgbClr val="000000"/>
+                      </a:solidFill>
+                    </a:lnB>
+                    <a:solidFill>
+                      <a:srgbClr val="FF0000"/>
+                    </a:solidFill>
+                  </a:tcPr>
+                </a:tc>
+                <a:tc>
+                  <a:txBody>
+                    <a:bodyPr/>
+                    <a:lstStyle/>
+                    <a:p/>
+                  </a:txBody>
+                  <a:tcPr>
+                    <a:lnL w="12700">
+                      <a:solidFill>
+                        <a:srgbClr val="000000"/>
+                      </a:solidFill>
+                    </a:lnL>
+                    <a:lnR w="12700">
+                      <a:solidFill>
+                        <a:srgbClr val="000000"/>
+                      </a:solidFill>
+                    </a:lnR>
+                    <a:lnT w="12700">
+                      <a:solidFill>
+                        <a:srgbClr val="000000"/>
+                      </a:solidFill>
+                    </a:lnT>
+                    <a:lnB w="12700">
+                      <a:solidFill>
+                        <a:srgbClr val="000000"/>
+                      </a:solidFill>
+                    </a:lnB>
+                    <a:solidFill>
+                      <a:srgbClr val="FF0000"/>
+                    </a:solidFill>
+                  </a:tcPr>
+                </a:tc>
+                <a:tc>
+                  <a:txBody>
+                    <a:bodyPr/>
+                    <a:lstStyle/>
+                    <a:p/>
+                  </a:txBody>
+                  <a:tcPr>
+                    <a:lnL w="12700">
+                      <a:solidFill>
+                        <a:srgbClr val="000000"/>
+                      </a:solidFill>
+                    </a:lnL>
+                    <a:lnR w="12700">
+                      <a:solidFill>
+                        <a:srgbClr val="000000"/>
+                      </a:solidFill>
+                    </a:lnR>
+                    <a:lnT w="12700">
+                      <a:solidFill>
+                        <a:srgbClr val="000000"/>
+                      </a:solidFill>
+                    </a:lnT>
+                    <a:lnB w="12700">
+                      <a:solidFill>
+                        <a:srgbClr val="000000"/>
+                      </a:solidFill>
+                    </a:lnB>
+                    <a:solidFill>
+                      <a:srgbClr val="FFFFFF"/>
+                    </a:solidFill>
+                  </a:tcPr>
+                </a:tc>
+              </a:tr>
+              <a:tr h="326440">
+                <a:tc vMerge="1">
+                  <a:txBody>
+                    <a:bodyPr/>
+                    <a:lstStyle/>
+                    <a:p/>
+                  </a:txBody>
+                  <a:tcPr>
+                    <a:lnL w="12700">
+                      <a:solidFill>
+                        <a:srgbClr val="000000"/>
+                      </a:solidFill>
+                    </a:lnL>
+                    <a:lnR w="12700">
+                      <a:solidFill>
+                        <a:srgbClr val="000000"/>
+                      </a:solidFill>
+                    </a:lnR>
+                    <a:lnT w="12700">
+                      <a:solidFill>
+                        <a:srgbClr val="000000"/>
+                      </a:solidFill>
+                    </a:lnT>
+                    <a:lnB w="12700">
+                      <a:solidFill>
+                        <a:srgbClr val="000000"/>
+                      </a:solidFill>
+                    </a:lnB>
+                  </a:tcPr>
+                </a:tc>
+                <a:tc>
+                  <a:txBody>
+                    <a:bodyPr/>
+                    <a:lstStyle/>
+                    <a:p/>
+                  </a:txBody>
+                  <a:tcPr>
+                    <a:lnL w="12700">
+                      <a:solidFill>
+                        <a:srgbClr val="000000"/>
+                      </a:solidFill>
+                    </a:lnL>
+                    <a:lnR w="12700">
+                      <a:solidFill>
+                        <a:srgbClr val="000000"/>
+                      </a:solidFill>
+                    </a:lnR>
+                    <a:lnT w="12700">
+                      <a:solidFill>
+                        <a:srgbClr val="000000"/>
+                      </a:solidFill>
+                    </a:lnT>
+                    <a:lnB w="12700">
+                      <a:solidFill>
+                        <a:srgbClr val="000000"/>
+                      </a:solidFill>
+                    </a:lnB>
+                    <a:solidFill>
+                      <a:srgbClr val="FFFFFF"/>
+                    </a:solidFill>
+                  </a:tcPr>
+                </a:tc>
+                <a:tc>
+                  <a:txBody>
+                    <a:bodyPr/>
+                    <a:lstStyle/>
+                    <a:p/>
+                  </a:txBody>
+                  <a:tcPr>
+                    <a:lnL w="12700">
+                      <a:solidFill>
+                        <a:srgbClr val="000000"/>
+                      </a:solidFill>
+                    </a:lnL>
+                    <a:lnR w="12700">
+                      <a:solidFill>
+                        <a:srgbClr val="000000"/>
+                      </a:solidFill>
+                    </a:lnR>
+                    <a:lnT w="12700">
+                      <a:solidFill>
+                        <a:srgbClr val="000000"/>
+                      </a:solidFill>
+                    </a:lnT>
+                    <a:lnB w="12700">
+                      <a:solidFill>
+                        <a:srgbClr val="000000"/>
+                      </a:solidFill>
+                    </a:lnB>
+                    <a:solidFill>
+                      <a:srgbClr val="00B050"/>
+                    </a:solidFill>
+                  </a:tcPr>
+                </a:tc>
+                <a:tc>
+                  <a:txBody>
+                    <a:bodyPr/>
+                    <a:lstStyle/>
+                    <a:p/>
+                  </a:txBody>
+                  <a:tcPr>
+                    <a:lnL w="12700">
+                      <a:solidFill>
+                        <a:srgbClr val="000000"/>
+                      </a:solidFill>
+                    </a:lnL>
+                    <a:lnR w="12700">
+                      <a:solidFill>
+                        <a:srgbClr val="000000"/>
+                      </a:solidFill>
+                    </a:lnR>
+                    <a:lnT w="12700">
+                      <a:solidFill>
+                        <a:srgbClr val="000000"/>
+                      </a:solidFill>
+                    </a:lnT>
+                    <a:lnB w="12700">
+                      <a:solidFill>
+                        <a:srgbClr val="000000"/>
+                      </a:solidFill>
+                    </a:lnB>
+                    <a:solidFill>
+                      <a:srgbClr val="00B050"/>
+                    </a:solidFill>
+                  </a:tcPr>
+                </a:tc>
+                <a:tc>
+                  <a:txBody>
+                    <a:bodyPr/>
+                    <a:lstStyle/>
+                    <a:p/>
+                  </a:txBody>
+                  <a:tcPr>
+                    <a:lnL w="12700">
+                      <a:solidFill>
+                        <a:srgbClr val="000000"/>
+                      </a:solidFill>
+                    </a:lnL>
+                    <a:lnR w="12700">
+                      <a:solidFill>
+                        <a:srgbClr val="000000"/>
+                      </a:solidFill>
+                    </a:lnR>
+                    <a:lnT w="12700">
+                      <a:solidFill>
+                        <a:srgbClr val="000000"/>
+                      </a:solidFill>
+                    </a:lnT>
+                    <a:lnB w="12700">
+                      <a:solidFill>
+                        <a:srgbClr val="000000"/>
+                      </a:solidFill>
+                    </a:lnB>
+                    <a:solidFill>
+                      <a:srgbClr val="FFFFFF"/>
+                    </a:solidFill>
+                  </a:tcPr>
+                </a:tc>
+                <a:tc>
+                  <a:txBody>
+                    <a:bodyPr/>
+                    <a:lstStyle/>
+                    <a:p/>
+                  </a:txBody>
+                  <a:tcPr>
+                    <a:lnL w="12700">
+                      <a:solidFill>
+                        <a:srgbClr val="000000"/>
+                      </a:solidFill>
+                    </a:lnL>
+                    <a:lnR w="12700">
+                      <a:solidFill>
+                        <a:srgbClr val="000000"/>
+                      </a:solidFill>
+                    </a:lnR>
+                    <a:lnT w="12700">
+                      <a:solidFill>
+                        <a:srgbClr val="000000"/>
+                      </a:solidFill>
+                    </a:lnT>
+                    <a:lnB w="12700">
+                      <a:solidFill>
+                        <a:srgbClr val="000000"/>
+                      </a:solidFill>
+                    </a:lnB>
+                    <a:solidFill>
+                      <a:srgbClr val="FFFFFF"/>
+                    </a:solidFill>
+                  </a:tcPr>
+                </a:tc>
+                <a:tc>
+                  <a:txBody>
+                    <a:bodyPr/>
+                    <a:lstStyle/>
+                    <a:p/>
+                  </a:txBody>
+                  <a:tcPr>
+                    <a:lnL w="12700">
+                      <a:solidFill>
+                        <a:srgbClr val="000000"/>
+                      </a:solidFill>
+                    </a:lnL>
+                    <a:lnR w="12700">
+                      <a:solidFill>
+                        <a:srgbClr val="000000"/>
+                      </a:solidFill>
+                    </a:lnR>
+                    <a:lnT w="12700">
+                      <a:solidFill>
+                        <a:srgbClr val="000000"/>
+                      </a:solidFill>
+                    </a:lnT>
+                    <a:lnB w="12700">
+                      <a:solidFill>
+                        <a:srgbClr val="000000"/>
+                      </a:solidFill>
+                    </a:lnB>
+                    <a:solidFill>
+                      <a:srgbClr val="FFFFFF"/>
+                    </a:solidFill>
+                  </a:tcPr>
+                </a:tc>
+              </a:tr>
+              <a:tr h="326440">
+                <a:tc rowSpan="2">
+                  <a:txBody>
+                    <a:bodyPr wrap="square"/>
+                    <a:lstStyle/>
+                    <a:p>
+                      <a:pPr algn="l"/>
+                      <a:r>
+                        <a:rPr b="1" sz="1100">
+                          <a:solidFill>
+                            <a:srgbClr val="000000"/>
+                          </a:solidFill>
+                        </a:rPr>
+                        <a:t>Module</a:t>
+                      </a:r>
+                    </a:p>
+                    <a:p>
+                      <a:pPr algn="l"/>
+                      <a:r>
+                        <a:rPr b="1" sz="1100">
+                          <a:solidFill>
+                            <a:srgbClr val="000000"/>
+                          </a:solidFill>
+                        </a:rPr>
+                        <a:t>Integration</a:t>
+                      </a:r>
+                    </a:p>
+                  </a:txBody>
+                  <a:tcPr>
+                    <a:lnL w="12700">
+                      <a:solidFill>
+                        <a:srgbClr val="000000"/>
+                      </a:solidFill>
+                    </a:lnL>
+                    <a:lnR w="12700">
+                      <a:solidFill>
+                        <a:srgbClr val="000000"/>
+                      </a:solidFill>
+                    </a:lnR>
+                    <a:lnT w="12700">
+                      <a:solidFill>
+                        <a:srgbClr val="000000"/>
+                      </a:solidFill>
+                    </a:lnT>
+                    <a:lnB w="12700">
+                      <a:solidFill>
+                        <a:srgbClr val="000000"/>
+                      </a:solidFill>
+                    </a:lnB>
+                    <a:solidFill>
+                      <a:srgbClr val="FFFFFF"/>
+                    </a:solidFill>
+                  </a:tcPr>
+                </a:tc>
+                <a:tc>
+                  <a:txBody>
+                    <a:bodyPr/>
+                    <a:lstStyle/>
+                    <a:p/>
+                  </a:txBody>
+                  <a:tcPr>
+                    <a:lnL w="12700">
+                      <a:solidFill>
+                        <a:srgbClr val="000000"/>
+                      </a:solidFill>
+                    </a:lnL>
+                    <a:lnR w="12700">
+                      <a:solidFill>
+                        <a:srgbClr val="000000"/>
+                      </a:solidFill>
+                    </a:lnR>
+                    <a:lnT w="12700">
+                      <a:solidFill>
+                        <a:srgbClr val="000000"/>
+                      </a:solidFill>
+                    </a:lnT>
+                    <a:lnB w="12700">
+                      <a:solidFill>
+                        <a:srgbClr val="000000"/>
+                      </a:solidFill>
+                    </a:lnB>
+                    <a:solidFill>
+                      <a:srgbClr val="FFFFFF"/>
+                    </a:solidFill>
+                  </a:tcPr>
+                </a:tc>
+                <a:tc>
+                  <a:txBody>
+                    <a:bodyPr/>
+                    <a:lstStyle/>
+                    <a:p/>
+                  </a:txBody>
+                  <a:tcPr>
+                    <a:lnL w="12700">
+                      <a:solidFill>
+                        <a:srgbClr val="000000"/>
+                      </a:solidFill>
+                    </a:lnL>
+                    <a:lnR w="12700">
+                      <a:solidFill>
+                        <a:srgbClr val="000000"/>
+                      </a:solidFill>
+                    </a:lnR>
+                    <a:lnT w="12700">
+                      <a:solidFill>
+                        <a:srgbClr val="000000"/>
+                      </a:solidFill>
+                    </a:lnT>
+                    <a:lnB w="12700">
+                      <a:solidFill>
+                        <a:srgbClr val="000000"/>
+                      </a:solidFill>
+                    </a:lnB>
+                    <a:solidFill>
+                      <a:srgbClr val="FFFFFF"/>
+                    </a:solidFill>
+                  </a:tcPr>
+                </a:tc>
+                <a:tc>
+                  <a:txBody>
+                    <a:bodyPr/>
+                    <a:lstStyle/>
+                    <a:p/>
+                  </a:txBody>
+                  <a:tcPr>
+                    <a:lnL w="12700">
+                      <a:solidFill>
+                        <a:srgbClr val="000000"/>
+                      </a:solidFill>
+                    </a:lnL>
+                    <a:lnR w="12700">
+                      <a:solidFill>
+                        <a:srgbClr val="000000"/>
+                      </a:solidFill>
+                    </a:lnR>
+                    <a:lnT w="12700">
+                      <a:solidFill>
+                        <a:srgbClr val="000000"/>
+                      </a:solidFill>
+                    </a:lnT>
+                    <a:lnB w="12700">
+                      <a:solidFill>
+                        <a:srgbClr val="000000"/>
+                      </a:solidFill>
+                    </a:lnB>
+                    <a:solidFill>
+                      <a:srgbClr val="FFFFFF"/>
+                    </a:solidFill>
+                  </a:tcPr>
+                </a:tc>
+                <a:tc>
+                  <a:txBody>
+                    <a:bodyPr/>
+                    <a:lstStyle/>
+                    <a:p/>
+                  </a:txBody>
+                  <a:tcPr>
+                    <a:lnL w="12700">
+                      <a:solidFill>
+                        <a:srgbClr val="000000"/>
+                      </a:solidFill>
+                    </a:lnL>
+                    <a:lnR w="12700">
+                      <a:solidFill>
+                        <a:srgbClr val="000000"/>
+                      </a:solidFill>
+                    </a:lnR>
+                    <a:lnT w="12700">
+                      <a:solidFill>
+                        <a:srgbClr val="000000"/>
+                      </a:solidFill>
+                    </a:lnT>
+                    <a:lnB w="12700">
+                      <a:solidFill>
+                        <a:srgbClr val="000000"/>
+                      </a:solidFill>
+                    </a:lnB>
+                    <a:solidFill>
+                      <a:srgbClr val="FF0000"/>
+                    </a:solidFill>
+                  </a:tcPr>
+                </a:tc>
+                <a:tc>
+                  <a:txBody>
+                    <a:bodyPr/>
+                    <a:lstStyle/>
+                    <a:p/>
+                  </a:txBody>
+                  <a:tcPr>
+                    <a:lnL w="12700">
+                      <a:solidFill>
+                        <a:srgbClr val="000000"/>
+                      </a:solidFill>
+                    </a:lnL>
+                    <a:lnR w="12700">
+                      <a:solidFill>
+                        <a:srgbClr val="000000"/>
+                      </a:solidFill>
+                    </a:lnR>
+                    <a:lnT w="12700">
+                      <a:solidFill>
+                        <a:srgbClr val="000000"/>
+                      </a:solidFill>
+                    </a:lnT>
+                    <a:lnB w="12700">
+                      <a:solidFill>
+                        <a:srgbClr val="000000"/>
+                      </a:solidFill>
+                    </a:lnB>
+                    <a:solidFill>
+                      <a:srgbClr val="FF0000"/>
+                    </a:solidFill>
+                  </a:tcPr>
+                </a:tc>
+                <a:tc>
+                  <a:txBody>
+                    <a:bodyPr/>
+                    <a:lstStyle/>
+                    <a:p/>
+                  </a:txBody>
+                  <a:tcPr>
+                    <a:lnL w="12700">
+                      <a:solidFill>
+                        <a:srgbClr val="000000"/>
+                      </a:solidFill>
+                    </a:lnL>
+                    <a:lnR w="12700">
+                      <a:solidFill>
+                        <a:srgbClr val="000000"/>
+                      </a:solidFill>
+                    </a:lnR>
+                    <a:lnT w="12700">
+                      <a:solidFill>
+                        <a:srgbClr val="000000"/>
+                      </a:solidFill>
+                    </a:lnT>
+                    <a:lnB w="12700">
+                      <a:solidFill>
+                        <a:srgbClr val="000000"/>
+                      </a:solidFill>
+                    </a:lnB>
+                    <a:solidFill>
+                      <a:srgbClr val="FFFFFF"/>
+                    </a:solidFill>
+                  </a:tcPr>
+                </a:tc>
+              </a:tr>
+              <a:tr h="326440">
+                <a:tc vMerge="1">
+                  <a:txBody>
+                    <a:bodyPr/>
+                    <a:lstStyle/>
+                    <a:p/>
+                  </a:txBody>
+                  <a:tcPr>
+                    <a:lnL w="12700">
+                      <a:solidFill>
+                        <a:srgbClr val="000000"/>
+                      </a:solidFill>
+                    </a:lnL>
+                    <a:lnR w="12700">
+                      <a:solidFill>
+                        <a:srgbClr val="000000"/>
+                      </a:solidFill>
+                    </a:lnR>
+                    <a:lnT w="12700">
+                      <a:solidFill>
+                        <a:srgbClr val="000000"/>
+                      </a:solidFill>
+                    </a:lnT>
+                    <a:lnB w="12700">
+                      <a:solidFill>
+                        <a:srgbClr val="000000"/>
+                      </a:solidFill>
+                    </a:lnB>
+                  </a:tcPr>
+                </a:tc>
+                <a:tc>
+                  <a:txBody>
+                    <a:bodyPr/>
+                    <a:lstStyle/>
+                    <a:p/>
+                  </a:txBody>
+                  <a:tcPr>
+                    <a:lnL w="12700">
+                      <a:solidFill>
+                        <a:srgbClr val="000000"/>
+                      </a:solidFill>
+                    </a:lnL>
+                    <a:lnR w="12700">
+                      <a:solidFill>
+                        <a:srgbClr val="000000"/>
+                      </a:solidFill>
+                    </a:lnR>
+                    <a:lnT w="12700">
+                      <a:solidFill>
+                        <a:srgbClr val="000000"/>
+                      </a:solidFill>
+                    </a:lnT>
+                    <a:lnB w="12700">
+                      <a:solidFill>
+                        <a:srgbClr val="000000"/>
+                      </a:solidFill>
+                    </a:lnB>
+                    <a:solidFill>
+                      <a:srgbClr val="FFFFFF"/>
+                    </a:solidFill>
+                  </a:tcPr>
+                </a:tc>
+                <a:tc>
+                  <a:txBody>
+                    <a:bodyPr/>
+                    <a:lstStyle/>
+                    <a:p/>
+                  </a:txBody>
+                  <a:tcPr>
+                    <a:lnL w="12700">
+                      <a:solidFill>
+                        <a:srgbClr val="000000"/>
+                      </a:solidFill>
+                    </a:lnL>
+                    <a:lnR w="12700">
+                      <a:solidFill>
+                        <a:srgbClr val="000000"/>
+                      </a:solidFill>
+                    </a:lnR>
+                    <a:lnT w="12700">
+                      <a:solidFill>
+                        <a:srgbClr val="000000"/>
+                      </a:solidFill>
+                    </a:lnT>
+                    <a:lnB w="12700">
+                      <a:solidFill>
+                        <a:srgbClr val="000000"/>
+                      </a:solidFill>
+                    </a:lnB>
+                    <a:solidFill>
+                      <a:srgbClr val="FFFFFF"/>
+                    </a:solidFill>
+                  </a:tcPr>
+                </a:tc>
+                <a:tc>
+                  <a:txBody>
+                    <a:bodyPr/>
+                    <a:lstStyle/>
+                    <a:p/>
+                  </a:txBody>
+                  <a:tcPr>
+                    <a:lnL w="12700">
+                      <a:solidFill>
+                        <a:srgbClr val="000000"/>
+                      </a:solidFill>
+                    </a:lnL>
+                    <a:lnR w="12700">
+                      <a:solidFill>
+                        <a:srgbClr val="000000"/>
+                      </a:solidFill>
+                    </a:lnR>
+                    <a:lnT w="12700">
+                      <a:solidFill>
+                        <a:srgbClr val="000000"/>
+                      </a:solidFill>
+                    </a:lnT>
+                    <a:lnB w="12700">
+                      <a:solidFill>
+                        <a:srgbClr val="000000"/>
+                      </a:solidFill>
+                    </a:lnB>
+                    <a:solidFill>
+                      <a:srgbClr val="FFFFFF"/>
+                    </a:solidFill>
+                  </a:tcPr>
+                </a:tc>
+                <a:tc>
+                  <a:txBody>
+                    <a:bodyPr/>
+                    <a:lstStyle/>
+                    <a:p/>
+                  </a:txBody>
+                  <a:tcPr>
+                    <a:lnL w="12700">
+                      <a:solidFill>
+                        <a:srgbClr val="000000"/>
+                      </a:solidFill>
+                    </a:lnL>
+                    <a:lnR w="12700">
+                      <a:solidFill>
+                        <a:srgbClr val="000000"/>
+                      </a:solidFill>
+                    </a:lnR>
+                    <a:lnT w="12700">
+                      <a:solidFill>
+                        <a:srgbClr val="000000"/>
+                      </a:solidFill>
+                    </a:lnT>
+                    <a:lnB w="12700">
+                      <a:solidFill>
+                        <a:srgbClr val="000000"/>
+                      </a:solidFill>
+                    </a:lnB>
+                    <a:solidFill>
+                      <a:srgbClr val="FFFFFF"/>
+                    </a:solidFill>
+                  </a:tcPr>
+                </a:tc>
+                <a:tc>
+                  <a:txBody>
+                    <a:bodyPr/>
+                    <a:lstStyle/>
+                    <a:p/>
+                  </a:txBody>
+                  <a:tcPr>
+                    <a:lnL w="12700">
+                      <a:solidFill>
+                        <a:srgbClr val="000000"/>
+                      </a:solidFill>
+                    </a:lnL>
+                    <a:lnR w="12700">
+                      <a:solidFill>
+                        <a:srgbClr val="000000"/>
+                      </a:solidFill>
+                    </a:lnR>
+                    <a:lnT w="12700">
+                      <a:solidFill>
+                        <a:srgbClr val="000000"/>
+                      </a:solidFill>
+                    </a:lnT>
+                    <a:lnB w="12700">
+                      <a:solidFill>
+                        <a:srgbClr val="000000"/>
+                      </a:solidFill>
+                    </a:lnB>
+                    <a:solidFill>
+                      <a:srgbClr val="FFFFFF"/>
+                    </a:solidFill>
+                  </a:tcPr>
+                </a:tc>
+                <a:tc>
+                  <a:txBody>
+                    <a:bodyPr/>
+                    <a:lstStyle/>
+                    <a:p/>
+                  </a:txBody>
+                  <a:tcPr>
+                    <a:lnL w="12700">
+                      <a:solidFill>
+                        <a:srgbClr val="000000"/>
+                      </a:solidFill>
+                    </a:lnL>
+                    <a:lnR w="12700">
+                      <a:solidFill>
+                        <a:srgbClr val="000000"/>
+                      </a:solidFill>
+                    </a:lnR>
+                    <a:lnT w="12700">
+                      <a:solidFill>
+                        <a:srgbClr val="000000"/>
+                      </a:solidFill>
+                    </a:lnT>
+                    <a:lnB w="12700">
+                      <a:solidFill>
+                        <a:srgbClr val="000000"/>
+                      </a:solidFill>
+                    </a:lnB>
+                    <a:solidFill>
+                      <a:srgbClr val="FFFFFF"/>
+                    </a:solidFill>
+                  </a:tcPr>
+                </a:tc>
+              </a:tr>
+              <a:tr h="326440">
+                <a:tc rowSpan="2">
+                  <a:txBody>
+                    <a:bodyPr wrap="square"/>
+                    <a:lstStyle/>
+                    <a:p>
+                      <a:pPr algn="l"/>
+                      <a:r>
+                        <a:rPr b="1" sz="1100">
+                          <a:solidFill>
+                            <a:srgbClr val="000000"/>
+                          </a:solidFill>
+                        </a:rPr>
+                        <a:t>Testing and</a:t>
+                      </a:r>
+                    </a:p>
+                    <a:p>
+                      <a:pPr algn="l"/>
+                      <a:r>
+                        <a:rPr b="1" sz="1100">
+                          <a:solidFill>
+                            <a:srgbClr val="000000"/>
+                          </a:solidFill>
+                        </a:rPr>
+                        <a:t>Deployment</a:t>
+                      </a:r>
+                    </a:p>
+                  </a:txBody>
+                  <a:tcPr>
+                    <a:lnL w="12700">
+                      <a:solidFill>
+                        <a:srgbClr val="000000"/>
+                      </a:solidFill>
+                    </a:lnL>
+                    <a:lnR w="12700">
+                      <a:solidFill>
+                        <a:srgbClr val="000000"/>
+                      </a:solidFill>
+                    </a:lnR>
+                    <a:lnT w="12700">
+                      <a:solidFill>
+                        <a:srgbClr val="000000"/>
+                      </a:solidFill>
+                    </a:lnT>
+                    <a:lnB w="12700">
+                      <a:solidFill>
+                        <a:srgbClr val="000000"/>
+                      </a:solidFill>
+                    </a:lnB>
+                    <a:solidFill>
+                      <a:srgbClr val="FFFFFF"/>
+                    </a:solidFill>
+                  </a:tcPr>
+                </a:tc>
+                <a:tc>
+                  <a:txBody>
+                    <a:bodyPr/>
+                    <a:lstStyle/>
+                    <a:p/>
+                  </a:txBody>
+                  <a:tcPr>
+                    <a:lnL w="12700">
+                      <a:solidFill>
+                        <a:srgbClr val="000000"/>
+                      </a:solidFill>
+                    </a:lnL>
+                    <a:lnR w="12700">
+                      <a:solidFill>
+                        <a:srgbClr val="000000"/>
+                      </a:solidFill>
+                    </a:lnR>
+                    <a:lnT w="12700">
+                      <a:solidFill>
+                        <a:srgbClr val="000000"/>
+                      </a:solidFill>
+                    </a:lnT>
+                    <a:lnB w="12700">
+                      <a:solidFill>
+                        <a:srgbClr val="000000"/>
+                      </a:solidFill>
+                    </a:lnB>
+                    <a:solidFill>
+                      <a:srgbClr val="FFFFFF"/>
+                    </a:solidFill>
+                  </a:tcPr>
+                </a:tc>
+                <a:tc>
+                  <a:txBody>
+                    <a:bodyPr/>
+                    <a:lstStyle/>
+                    <a:p/>
+                  </a:txBody>
+                  <a:tcPr>
+                    <a:lnL w="12700">
+                      <a:solidFill>
+                        <a:srgbClr val="000000"/>
+                      </a:solidFill>
+                    </a:lnL>
+                    <a:lnR w="12700">
+                      <a:solidFill>
+                        <a:srgbClr val="000000"/>
+                      </a:solidFill>
+                    </a:lnR>
+                    <a:lnT w="12700">
+                      <a:solidFill>
+                        <a:srgbClr val="000000"/>
+                      </a:solidFill>
+                    </a:lnT>
+                    <a:lnB w="12700">
+                      <a:solidFill>
+                        <a:srgbClr val="000000"/>
+                      </a:solidFill>
+                    </a:lnB>
+                    <a:solidFill>
+                      <a:srgbClr val="FFFFFF"/>
+                    </a:solidFill>
+                  </a:tcPr>
+                </a:tc>
+                <a:tc>
+                  <a:txBody>
+                    <a:bodyPr/>
+                    <a:lstStyle/>
+                    <a:p/>
+                  </a:txBody>
+                  <a:tcPr>
+                    <a:lnL w="12700">
+                      <a:solidFill>
+                        <a:srgbClr val="000000"/>
+                      </a:solidFill>
+                    </a:lnL>
+                    <a:lnR w="12700">
+                      <a:solidFill>
+                        <a:srgbClr val="000000"/>
+                      </a:solidFill>
+                    </a:lnR>
+                    <a:lnT w="12700">
+                      <a:solidFill>
+                        <a:srgbClr val="000000"/>
+                      </a:solidFill>
+                    </a:lnT>
+                    <a:lnB w="12700">
+                      <a:solidFill>
+                        <a:srgbClr val="000000"/>
+                      </a:solidFill>
+                    </a:lnB>
+                    <a:solidFill>
+                      <a:srgbClr val="FFFFFF"/>
+                    </a:solidFill>
+                  </a:tcPr>
+                </a:tc>
+                <a:tc>
+                  <a:txBody>
+                    <a:bodyPr/>
+                    <a:lstStyle/>
+                    <a:p/>
+                  </a:txBody>
+                  <a:tcPr>
+                    <a:lnL w="12700">
+                      <a:solidFill>
+                        <a:srgbClr val="000000"/>
+                      </a:solidFill>
+                    </a:lnL>
+                    <a:lnR w="12700">
+                      <a:solidFill>
+                        <a:srgbClr val="000000"/>
+                      </a:solidFill>
+                    </a:lnR>
+                    <a:lnT w="12700">
+                      <a:solidFill>
+                        <a:srgbClr val="000000"/>
+                      </a:solidFill>
+                    </a:lnT>
+                    <a:lnB w="12700">
+                      <a:solidFill>
+                        <a:srgbClr val="000000"/>
+                      </a:solidFill>
+                    </a:lnB>
+                    <a:solidFill>
+                      <a:srgbClr val="FFFFFF"/>
+                    </a:solidFill>
+                  </a:tcPr>
+                </a:tc>
+                <a:tc>
+                  <a:txBody>
+                    <a:bodyPr/>
+                    <a:lstStyle/>
+                    <a:p/>
+                  </a:txBody>
+                  <a:tcPr>
+                    <a:lnL w="12700">
+                      <a:solidFill>
+                        <a:srgbClr val="000000"/>
+                      </a:solidFill>
+                    </a:lnL>
+                    <a:lnR w="12700">
+                      <a:solidFill>
+                        <a:srgbClr val="000000"/>
+                      </a:solidFill>
+                    </a:lnR>
+                    <a:lnT w="12700">
+                      <a:solidFill>
+                        <a:srgbClr val="000000"/>
+                      </a:solidFill>
+                    </a:lnT>
+                    <a:lnB w="12700">
+                      <a:solidFill>
+                        <a:srgbClr val="000000"/>
+                      </a:solidFill>
+                    </a:lnB>
+                    <a:solidFill>
+                      <a:srgbClr val="FF0000"/>
+                    </a:solidFill>
+                  </a:tcPr>
+                </a:tc>
+                <a:tc>
+                  <a:txBody>
+                    <a:bodyPr/>
+                    <a:lstStyle/>
+                    <a:p/>
+                  </a:txBody>
+                  <a:tcPr>
+                    <a:lnL w="12700">
+                      <a:solidFill>
+                        <a:srgbClr val="000000"/>
+                      </a:solidFill>
+                    </a:lnL>
+                    <a:lnR w="12700">
+                      <a:solidFill>
+                        <a:srgbClr val="000000"/>
+                      </a:solidFill>
+                    </a:lnR>
+                    <a:lnT w="12700">
+                      <a:solidFill>
+                        <a:srgbClr val="000000"/>
+                      </a:solidFill>
+                    </a:lnT>
+                    <a:lnB w="12700">
+                      <a:solidFill>
+                        <a:srgbClr val="000000"/>
+                      </a:solidFill>
+                    </a:lnB>
+                    <a:solidFill>
+                      <a:srgbClr val="FF0000"/>
+                    </a:solidFill>
+                  </a:tcPr>
+                </a:tc>
+              </a:tr>
+              <a:tr h="326440">
+                <a:tc vMerge="1">
+                  <a:txBody>
+                    <a:bodyPr/>
+                    <a:lstStyle/>
+                    <a:p/>
+                  </a:txBody>
+                  <a:tcPr>
+                    <a:lnL w="12700">
+                      <a:solidFill>
+                        <a:srgbClr val="000000"/>
+                      </a:solidFill>
+                    </a:lnL>
+                    <a:lnR w="12700">
+                      <a:solidFill>
+                        <a:srgbClr val="000000"/>
+                      </a:solidFill>
+                    </a:lnR>
+                    <a:lnT w="12700">
+                      <a:solidFill>
+                        <a:srgbClr val="000000"/>
+                      </a:solidFill>
+                    </a:lnT>
+                    <a:lnB w="12700">
+                      <a:solidFill>
+                        <a:srgbClr val="000000"/>
+                      </a:solidFill>
+                    </a:lnB>
+                  </a:tcPr>
+                </a:tc>
+                <a:tc>
+                  <a:txBody>
+                    <a:bodyPr/>
+                    <a:lstStyle/>
+                    <a:p/>
+                  </a:txBody>
+                  <a:tcPr>
+                    <a:lnL w="12700">
+                      <a:solidFill>
+                        <a:srgbClr val="000000"/>
+                      </a:solidFill>
+                    </a:lnL>
+                    <a:lnR w="12700">
+                      <a:solidFill>
+                        <a:srgbClr val="000000"/>
+                      </a:solidFill>
+                    </a:lnR>
+                    <a:lnT w="12700">
+                      <a:solidFill>
+                        <a:srgbClr val="000000"/>
+                      </a:solidFill>
+                    </a:lnT>
+                    <a:lnB w="12700">
+                      <a:solidFill>
+                        <a:srgbClr val="000000"/>
+                      </a:solidFill>
+                    </a:lnB>
+                    <a:solidFill>
+                      <a:srgbClr val="FFFFFF"/>
+                    </a:solidFill>
+                  </a:tcPr>
+                </a:tc>
+                <a:tc>
+                  <a:txBody>
+                    <a:bodyPr/>
+                    <a:lstStyle/>
+                    <a:p/>
+                  </a:txBody>
+                  <a:tcPr>
+                    <a:lnL w="12700">
+                      <a:solidFill>
+                        <a:srgbClr val="000000"/>
+                      </a:solidFill>
+                    </a:lnL>
+                    <a:lnR w="12700">
+                      <a:solidFill>
+                        <a:srgbClr val="000000"/>
+                      </a:solidFill>
+                    </a:lnR>
+                    <a:lnT w="12700">
+                      <a:solidFill>
+                        <a:srgbClr val="000000"/>
+                      </a:solidFill>
+                    </a:lnT>
+                    <a:lnB w="12700">
+                      <a:solidFill>
+                        <a:srgbClr val="000000"/>
+                      </a:solidFill>
+                    </a:lnB>
+                    <a:solidFill>
+                      <a:srgbClr val="FFFFFF"/>
+                    </a:solidFill>
+                  </a:tcPr>
+                </a:tc>
+                <a:tc>
+                  <a:txBody>
+                    <a:bodyPr/>
+                    <a:lstStyle/>
+                    <a:p/>
+                  </a:txBody>
+                  <a:tcPr>
+                    <a:lnL w="12700">
+                      <a:solidFill>
+                        <a:srgbClr val="000000"/>
+                      </a:solidFill>
+                    </a:lnL>
+                    <a:lnR w="12700">
+                      <a:solidFill>
+                        <a:srgbClr val="000000"/>
+                      </a:solidFill>
+                    </a:lnR>
+                    <a:lnT w="12700">
+                      <a:solidFill>
+                        <a:srgbClr val="000000"/>
+                      </a:solidFill>
+                    </a:lnT>
+                    <a:lnB w="12700">
+                      <a:solidFill>
+                        <a:srgbClr val="000000"/>
+                      </a:solidFill>
+                    </a:lnB>
+                    <a:solidFill>
+                      <a:srgbClr val="FFFFFF"/>
+                    </a:solidFill>
+                  </a:tcPr>
+                </a:tc>
+                <a:tc>
+                  <a:txBody>
+                    <a:bodyPr/>
+                    <a:lstStyle/>
+                    <a:p/>
+                  </a:txBody>
+                  <a:tcPr>
+                    <a:lnL w="12700">
+                      <a:solidFill>
+                        <a:srgbClr val="000000"/>
+                      </a:solidFill>
+                    </a:lnL>
+                    <a:lnR w="12700">
+                      <a:solidFill>
+                        <a:srgbClr val="000000"/>
+                      </a:solidFill>
+                    </a:lnR>
+                    <a:lnT w="12700">
+                      <a:solidFill>
+                        <a:srgbClr val="000000"/>
+                      </a:solidFill>
+                    </a:lnT>
+                    <a:lnB w="12700">
+                      <a:solidFill>
+                        <a:srgbClr val="000000"/>
+                      </a:solidFill>
+                    </a:lnB>
+                    <a:solidFill>
+                      <a:srgbClr val="FFFFFF"/>
+                    </a:solidFill>
+                  </a:tcPr>
+                </a:tc>
+                <a:tc>
+                  <a:txBody>
+                    <a:bodyPr/>
+                    <a:lstStyle/>
+                    <a:p/>
+                  </a:txBody>
+                  <a:tcPr>
+                    <a:lnL w="12700">
+                      <a:solidFill>
+                        <a:srgbClr val="000000"/>
+                      </a:solidFill>
+                    </a:lnL>
+                    <a:lnR w="12700">
+                      <a:solidFill>
+                        <a:srgbClr val="000000"/>
+                      </a:solidFill>
+                    </a:lnR>
+                    <a:lnT w="12700">
+                      <a:solidFill>
+                        <a:srgbClr val="000000"/>
+                      </a:solidFill>
+                    </a:lnT>
+                    <a:lnB w="12700">
+                      <a:solidFill>
+                        <a:srgbClr val="000000"/>
+                      </a:solidFill>
+                    </a:lnB>
+                    <a:solidFill>
+                      <a:srgbClr val="FFFFFF"/>
+                    </a:solidFill>
+                  </a:tcPr>
+                </a:tc>
+                <a:tc>
+                  <a:txBody>
+                    <a:bodyPr/>
+                    <a:lstStyle/>
+                    <a:p/>
+                  </a:txBody>
+                  <a:tcPr>
+                    <a:lnL w="12700">
+                      <a:solidFill>
+                        <a:srgbClr val="000000"/>
+                      </a:solidFill>
+                    </a:lnL>
+                    <a:lnR w="12700">
+                      <a:solidFill>
+                        <a:srgbClr val="000000"/>
+                      </a:solidFill>
+                    </a:lnR>
+                    <a:lnT w="12700">
+                      <a:solidFill>
+                        <a:srgbClr val="000000"/>
+                      </a:solidFill>
+                    </a:lnT>
+                    <a:lnB w="12700">
+                      <a:solidFill>
+                        <a:srgbClr val="000000"/>
+                      </a:solidFill>
+                    </a:lnB>
+                    <a:solidFill>
+                      <a:srgbClr val="FFFFFF"/>
+                    </a:solidFill>
+                  </a:tcPr>
+                </a:tc>
+              </a:tr>
+              <a:tr h="326440">
+                <a:tc rowSpan="2">
+                  <a:txBody>
+                    <a:bodyPr wrap="square"/>
+                    <a:lstStyle/>
+                    <a:p>
+                      <a:pPr algn="l"/>
+                      <a:r>
+                        <a:rPr b="1" sz="1100">
+                          <a:solidFill>
+                            <a:srgbClr val="000000"/>
+                          </a:solidFill>
+                        </a:rPr>
+                        <a:t>Documentation</a:t>
+                      </a:r>
+                    </a:p>
+                  </a:txBody>
+                  <a:tcPr>
+                    <a:lnL w="12700">
+                      <a:solidFill>
+                        <a:srgbClr val="000000"/>
+                      </a:solidFill>
+                    </a:lnL>
+                    <a:lnR w="12700">
+                      <a:solidFill>
+                        <a:srgbClr val="000000"/>
+                      </a:solidFill>
+                    </a:lnR>
+                    <a:lnT w="12700">
+                      <a:solidFill>
+                        <a:srgbClr val="000000"/>
+                      </a:solidFill>
+                    </a:lnT>
+                    <a:lnB w="12700">
+                      <a:solidFill>
+                        <a:srgbClr val="000000"/>
+                      </a:solidFill>
+                    </a:lnB>
+                    <a:solidFill>
+                      <a:srgbClr val="FFFFFF"/>
+                    </a:solidFill>
+                  </a:tcPr>
+                </a:tc>
+                <a:tc>
+                  <a:txBody>
+                    <a:bodyPr/>
+                    <a:lstStyle/>
+                    <a:p/>
+                  </a:txBody>
+                  <a:tcPr>
+                    <a:lnL w="12700">
+                      <a:solidFill>
+                        <a:srgbClr val="000000"/>
+                      </a:solidFill>
+                    </a:lnL>
+                    <a:lnR w="12700">
+                      <a:solidFill>
+                        <a:srgbClr val="000000"/>
+                      </a:solidFill>
+                    </a:lnR>
+                    <a:lnT w="12700">
+                      <a:solidFill>
+                        <a:srgbClr val="000000"/>
+                      </a:solidFill>
+                    </a:lnT>
+                    <a:lnB w="12700">
+                      <a:solidFill>
+                        <a:srgbClr val="000000"/>
+                      </a:solidFill>
+                    </a:lnB>
+                    <a:solidFill>
+                      <a:srgbClr val="FF0000"/>
+                    </a:solidFill>
+                  </a:tcPr>
+                </a:tc>
+                <a:tc>
+                  <a:txBody>
+                    <a:bodyPr/>
+                    <a:lstStyle/>
+                    <a:p/>
+                  </a:txBody>
+                  <a:tcPr>
+                    <a:lnL w="12700">
+                      <a:solidFill>
+                        <a:srgbClr val="000000"/>
+                      </a:solidFill>
+                    </a:lnL>
+                    <a:lnR w="12700">
+                      <a:solidFill>
+                        <a:srgbClr val="000000"/>
+                      </a:solidFill>
+                    </a:lnR>
+                    <a:lnT w="12700">
+                      <a:solidFill>
+                        <a:srgbClr val="000000"/>
+                      </a:solidFill>
+                    </a:lnT>
+                    <a:lnB w="12700">
+                      <a:solidFill>
+                        <a:srgbClr val="000000"/>
+                      </a:solidFill>
+                    </a:lnB>
+                    <a:solidFill>
+                      <a:srgbClr val="FF0000"/>
+                    </a:solidFill>
+                  </a:tcPr>
+                </a:tc>
+                <a:tc>
+                  <a:txBody>
+                    <a:bodyPr/>
+                    <a:lstStyle/>
+                    <a:p/>
+                  </a:txBody>
+                  <a:tcPr>
+                    <a:lnL w="12700">
+                      <a:solidFill>
+                        <a:srgbClr val="000000"/>
+                      </a:solidFill>
+                    </a:lnL>
+                    <a:lnR w="12700">
+                      <a:solidFill>
+                        <a:srgbClr val="000000"/>
+                      </a:solidFill>
+                    </a:lnR>
+                    <a:lnT w="12700">
+                      <a:solidFill>
+                        <a:srgbClr val="000000"/>
+                      </a:solidFill>
+                    </a:lnT>
+                    <a:lnB w="12700">
+                      <a:solidFill>
+                        <a:srgbClr val="000000"/>
+                      </a:solidFill>
+                    </a:lnB>
+                    <a:solidFill>
+                      <a:srgbClr val="FFFFFF"/>
+                    </a:solidFill>
+                  </a:tcPr>
+                </a:tc>
+                <a:tc>
+                  <a:txBody>
+                    <a:bodyPr/>
+                    <a:lstStyle/>
+                    <a:p/>
+                  </a:txBody>
+                  <a:tcPr>
+                    <a:lnL w="12700">
+                      <a:solidFill>
+                        <a:srgbClr val="000000"/>
+                      </a:solidFill>
+                    </a:lnL>
+                    <a:lnR w="12700">
+                      <a:solidFill>
+                        <a:srgbClr val="000000"/>
+                      </a:solidFill>
+                    </a:lnR>
+                    <a:lnT w="12700">
+                      <a:solidFill>
+                        <a:srgbClr val="000000"/>
+                      </a:solidFill>
+                    </a:lnT>
+                    <a:lnB w="12700">
+                      <a:solidFill>
+                        <a:srgbClr val="000000"/>
+                      </a:solidFill>
+                    </a:lnB>
+                    <a:solidFill>
+                      <a:srgbClr val="FF0000"/>
+                    </a:solidFill>
+                  </a:tcPr>
+                </a:tc>
+                <a:tc>
+                  <a:txBody>
+                    <a:bodyPr/>
+                    <a:lstStyle/>
+                    <a:p/>
+                  </a:txBody>
+                  <a:tcPr>
+                    <a:lnL w="12700">
+                      <a:solidFill>
+                        <a:srgbClr val="000000"/>
+                      </a:solidFill>
+                    </a:lnL>
+                    <a:lnR w="12700">
+                      <a:solidFill>
+                        <a:srgbClr val="000000"/>
+                      </a:solidFill>
+                    </a:lnR>
+                    <a:lnT w="12700">
+                      <a:solidFill>
+                        <a:srgbClr val="000000"/>
+                      </a:solidFill>
+                    </a:lnT>
+                    <a:lnB w="12700">
+                      <a:solidFill>
+                        <a:srgbClr val="000000"/>
+                      </a:solidFill>
+                    </a:lnB>
+                    <a:solidFill>
+                      <a:srgbClr val="FF0000"/>
+                    </a:solidFill>
+                  </a:tcPr>
+                </a:tc>
+                <a:tc>
+                  <a:txBody>
+                    <a:bodyPr/>
+                    <a:lstStyle/>
+                    <a:p/>
+                  </a:txBody>
+                  <a:tcPr>
+                    <a:lnL w="12700">
+                      <a:solidFill>
+                        <a:srgbClr val="000000"/>
+                      </a:solidFill>
+                    </a:lnL>
+                    <a:lnR w="12700">
+                      <a:solidFill>
+                        <a:srgbClr val="000000"/>
+                      </a:solidFill>
+                    </a:lnR>
+                    <a:lnT w="12700">
+                      <a:solidFill>
+                        <a:srgbClr val="000000"/>
+                      </a:solidFill>
+                    </a:lnT>
+                    <a:lnB w="12700">
+                      <a:solidFill>
+                        <a:srgbClr val="000000"/>
+                      </a:solidFill>
+                    </a:lnB>
+                    <a:solidFill>
+                      <a:srgbClr val="FF0000"/>
+                    </a:solidFill>
+                  </a:tcPr>
+                </a:tc>
+              </a:tr>
+              <a:tr h="326440">
+                <a:tc vMerge="1">
+                  <a:txBody>
+                    <a:bodyPr/>
+                    <a:lstStyle/>
+                    <a:p/>
+                  </a:txBody>
+                  <a:tcPr>
+                    <a:lnL w="12700">
+                      <a:solidFill>
+                        <a:srgbClr val="000000"/>
+                      </a:solidFill>
+                    </a:lnL>
+                    <a:lnR w="12700">
+                      <a:solidFill>
+                        <a:srgbClr val="000000"/>
+                      </a:solidFill>
+                    </a:lnR>
+                    <a:lnT w="12700">
+                      <a:solidFill>
+                        <a:srgbClr val="000000"/>
+                      </a:solidFill>
+                    </a:lnT>
+                    <a:lnB w="12700">
+                      <a:solidFill>
+                        <a:srgbClr val="000000"/>
+                      </a:solidFill>
+                    </a:lnB>
+                  </a:tcPr>
+                </a:tc>
+                <a:tc>
+                  <a:txBody>
+                    <a:bodyPr/>
+                    <a:lstStyle/>
+                    <a:p/>
+                  </a:txBody>
+                  <a:tcPr>
+                    <a:lnL w="12700">
+                      <a:solidFill>
+                        <a:srgbClr val="000000"/>
+                      </a:solidFill>
+                    </a:lnL>
+                    <a:lnR w="12700">
+                      <a:solidFill>
+                        <a:srgbClr val="000000"/>
+                      </a:solidFill>
+                    </a:lnR>
+                    <a:lnT w="12700">
+                      <a:solidFill>
+                        <a:srgbClr val="000000"/>
+                      </a:solidFill>
+                    </a:lnT>
+                    <a:lnB w="12700">
+                      <a:solidFill>
+                        <a:srgbClr val="000000"/>
+                      </a:solidFill>
+                    </a:lnB>
+                    <a:solidFill>
+                      <a:srgbClr val="00B050"/>
+                    </a:solidFill>
+                  </a:tcPr>
+                </a:tc>
+                <a:tc>
+                  <a:txBody>
+                    <a:bodyPr/>
+                    <a:lstStyle/>
+                    <a:p/>
+                  </a:txBody>
+                  <a:tcPr>
+                    <a:lnL w="12700">
+                      <a:solidFill>
+                        <a:srgbClr val="000000"/>
+                      </a:solidFill>
+                    </a:lnL>
+                    <a:lnR w="12700">
+                      <a:solidFill>
+                        <a:srgbClr val="000000"/>
+                      </a:solidFill>
+                    </a:lnR>
+                    <a:lnT w="12700">
+                      <a:solidFill>
+                        <a:srgbClr val="000000"/>
+                      </a:solidFill>
+                    </a:lnT>
+                    <a:lnB w="12700">
+                      <a:solidFill>
+                        <a:srgbClr val="000000"/>
+                      </a:solidFill>
+                    </a:lnB>
+                    <a:solidFill>
+                      <a:srgbClr val="00B050"/>
+                    </a:solidFill>
+                  </a:tcPr>
+                </a:tc>
+                <a:tc>
+                  <a:txBody>
+                    <a:bodyPr/>
+                    <a:lstStyle/>
+                    <a:p/>
+                  </a:txBody>
+                  <a:tcPr>
+                    <a:lnL w="12700">
+                      <a:solidFill>
+                        <a:srgbClr val="000000"/>
+                      </a:solidFill>
+                    </a:lnL>
+                    <a:lnR w="12700">
+                      <a:solidFill>
+                        <a:srgbClr val="000000"/>
+                      </a:solidFill>
+                    </a:lnR>
+                    <a:lnT w="12700">
+                      <a:solidFill>
+                        <a:srgbClr val="000000"/>
+                      </a:solidFill>
+                    </a:lnT>
+                    <a:lnB w="12700">
+                      <a:solidFill>
+                        <a:srgbClr val="000000"/>
+                      </a:solidFill>
+                    </a:lnB>
+                    <a:solidFill>
+                      <a:srgbClr val="FFFFFF"/>
+                    </a:solidFill>
+                  </a:tcPr>
+                </a:tc>
+                <a:tc>
+                  <a:txBody>
+                    <a:bodyPr/>
+                    <a:lstStyle/>
+                    <a:p/>
+                  </a:txBody>
+                  <a:tcPr>
+                    <a:lnL w="12700">
+                      <a:solidFill>
+                        <a:srgbClr val="000000"/>
+                      </a:solidFill>
+                    </a:lnL>
+                    <a:lnR w="12700">
+                      <a:solidFill>
+                        <a:srgbClr val="000000"/>
+                      </a:solidFill>
+                    </a:lnR>
+                    <a:lnT w="12700">
+                      <a:solidFill>
+                        <a:srgbClr val="000000"/>
+                      </a:solidFill>
+                    </a:lnT>
+                    <a:lnB w="12700">
+                      <a:solidFill>
+                        <a:srgbClr val="000000"/>
+                      </a:solidFill>
+                    </a:lnB>
+                    <a:solidFill>
+                      <a:srgbClr val="FFFFFF"/>
+                    </a:solidFill>
+                  </a:tcPr>
+                </a:tc>
+                <a:tc>
+                  <a:txBody>
+                    <a:bodyPr/>
+                    <a:lstStyle/>
+                    <a:p/>
+                  </a:txBody>
+                  <a:tcPr>
+                    <a:lnL w="12700">
+                      <a:solidFill>
+                        <a:srgbClr val="000000"/>
+                      </a:solidFill>
+                    </a:lnL>
+                    <a:lnR w="12700">
+                      <a:solidFill>
+                        <a:srgbClr val="000000"/>
+                      </a:solidFill>
+                    </a:lnR>
+                    <a:lnT w="12700">
+                      <a:solidFill>
+                        <a:srgbClr val="000000"/>
+                      </a:solidFill>
+                    </a:lnT>
+                    <a:lnB w="12700">
+                      <a:solidFill>
+                        <a:srgbClr val="000000"/>
+                      </a:solidFill>
+                    </a:lnB>
+                    <a:solidFill>
+                      <a:srgbClr val="FFFFFF"/>
+                    </a:solidFill>
+                  </a:tcPr>
+                </a:tc>
+                <a:tc>
+                  <a:txBody>
+                    <a:bodyPr/>
+                    <a:lstStyle/>
+                    <a:p/>
+                  </a:txBody>
+                  <a:tcPr>
+                    <a:lnL w="12700">
+                      <a:solidFill>
+                        <a:srgbClr val="000000"/>
+                      </a:solidFill>
+                    </a:lnL>
+                    <a:lnR w="12700">
+                      <a:solidFill>
+                        <a:srgbClr val="000000"/>
+                      </a:solidFill>
+                    </a:lnR>
+                    <a:lnT w="12700">
+                      <a:solidFill>
+                        <a:srgbClr val="000000"/>
+                      </a:solidFill>
+                    </a:lnT>
+                    <a:lnB w="12700">
+                      <a:solidFill>
+                        <a:srgbClr val="000000"/>
+                      </a:solidFill>
+                    </a:lnB>
+                    <a:solidFill>
+                      <a:srgbClr val="FFFFFF"/>
+                    </a:solidFill>
+                  </a:tcPr>
+                </a:tc>
+              </a:tr>
+            </a:tbl>
+          </a:graphicData>
+        </a:graphic>
+      </p:graphicFrame>
+      <p:sp>
+        <p:nvSpPr>
+          <p:cNvPr id="10" name="Rectangle 9"/>
           <p:cNvSpPr/>
           <p:nvPr/>
         </p:nvSpPr>
         <p:spPr>
           <a:xfrm>
-            <a:off x="274320" y="1298448"/>
-            <a:ext cx="4206240" cy="530352"/>
+            <a:off x="3200400" y="6400800"/>
+            <a:ext cx="228600" cy="164592"/>
           </a:xfrm>
           <a:prstGeom prst="rect">
             <a:avLst/>
           </a:prstGeom>
           <a:solidFill>
-            <a:srgbClr val="2E74B5"/>
+            <a:srgbClr val="FF0000"/>
           </a:solidFill>
           <a:ln>
             <a:noFill/>
@@ -8747,14 +12419,14 @@
       </p:sp>
       <p:sp>
         <p:nvSpPr>
-          <p:cNvPr id="10" name="TextBox 9"/>
-          <p:cNvSpPr txBox="1"/>
-          <p:nvPr/>
-        </p:nvSpPr>
-        <p:spPr>
-          <a:xfrm>
-            <a:off x="338328" y="1389888"/>
-            <a:ext cx="4206240" cy="530352"/>
+          <p:cNvPr id="11" name="TextBox 10"/>
+          <p:cNvSpPr txBox="1"/>
+          <p:nvPr/>
+        </p:nvSpPr>
+        <p:spPr>
+          <a:xfrm>
+            <a:off x="3474720" y="6391656"/>
+            <a:ext cx="1463040" cy="201168"/>
           </a:xfrm>
           <a:prstGeom prst="rect">
             <a:avLst/>
@@ -8769,32 +12441,32 @@
           <a:p>
             <a:pPr algn="l"/>
             <a:r>
-              <a:rPr sz="1200" b="1" i="0">
-                <a:solidFill>
-                  <a:srgbClr val="FFFFFF"/>
-                </a:solidFill>
-              </a:rPr>
-              <a:t>Activity</a:t>
-            </a:r>
-          </a:p>
-        </p:txBody>
-      </p:sp>
-      <p:sp>
-        <p:nvSpPr>
-          <p:cNvPr id="11" name="Rectangle 10"/>
+              <a:rPr sz="1000" b="0" i="0">
+                <a:solidFill>
+                  <a:srgbClr val="000000"/>
+                </a:solidFill>
+              </a:rPr>
+              <a:t>Planned Schedule</a:t>
+            </a:r>
+          </a:p>
+        </p:txBody>
+      </p:sp>
+      <p:sp>
+        <p:nvSpPr>
+          <p:cNvPr id="12" name="Rectangle 11"/>
           <p:cNvSpPr/>
           <p:nvPr/>
         </p:nvSpPr>
         <p:spPr>
           <a:xfrm>
-            <a:off x="4480560" y="1298448"/>
-            <a:ext cx="2103120" cy="530352"/>
+            <a:off x="5212080" y="6400800"/>
+            <a:ext cx="228600" cy="164592"/>
           </a:xfrm>
           <a:prstGeom prst="rect">
             <a:avLst/>
           </a:prstGeom>
           <a:solidFill>
-            <a:srgbClr val="2E74B5"/>
+            <a:srgbClr val="00B050"/>
           </a:solidFill>
           <a:ln>
             <a:noFill/>
@@ -8824,14 +12496,14 @@
       </p:sp>
       <p:sp>
         <p:nvSpPr>
-          <p:cNvPr id="12" name="TextBox 11"/>
-          <p:cNvSpPr txBox="1"/>
-          <p:nvPr/>
-        </p:nvSpPr>
-        <p:spPr>
-          <a:xfrm>
-            <a:off x="4544568" y="1389888"/>
-            <a:ext cx="2103120" cy="530352"/>
+          <p:cNvPr id="13" name="TextBox 12"/>
+          <p:cNvSpPr txBox="1"/>
+          <p:nvPr/>
+        </p:nvSpPr>
+        <p:spPr>
+          <a:xfrm>
+            <a:off x="5486400" y="6391656"/>
+            <a:ext cx="1371600" cy="201168"/>
           </a:xfrm>
           <a:prstGeom prst="rect">
             <a:avLst/>
@@ -8846,1937 +12518,12 @@
           <a:p>
             <a:pPr algn="l"/>
             <a:r>
-              <a:rPr sz="1200" b="1" i="0">
-                <a:solidFill>
-                  <a:srgbClr val="FFFFFF"/>
-                </a:solidFill>
-              </a:rPr>
-              <a:t>Timeline</a:t>
-            </a:r>
-          </a:p>
-        </p:txBody>
-      </p:sp>
-      <p:sp>
-        <p:nvSpPr>
-          <p:cNvPr id="13" name="Rectangle 12"/>
-          <p:cNvSpPr/>
-          <p:nvPr/>
-        </p:nvSpPr>
-        <p:spPr>
-          <a:xfrm>
-            <a:off x="6583680" y="1298448"/>
-            <a:ext cx="1737360" cy="530352"/>
-          </a:xfrm>
-          <a:prstGeom prst="rect">
-            <a:avLst/>
-          </a:prstGeom>
-          <a:solidFill>
-            <a:srgbClr val="2E74B5"/>
-          </a:solidFill>
-          <a:ln>
-            <a:noFill/>
-          </a:ln>
-        </p:spPr>
-        <p:style>
-          <a:lnRef idx="1">
-            <a:schemeClr val="accent1"/>
-          </a:lnRef>
-          <a:fillRef idx="3">
-            <a:schemeClr val="accent1"/>
-          </a:fillRef>
-          <a:effectRef idx="2">
-            <a:schemeClr val="accent1"/>
-          </a:effectRef>
-          <a:fontRef idx="minor">
-            <a:schemeClr val="lt1"/>
-          </a:fontRef>
-        </p:style>
-        <p:txBody>
-          <a:bodyPr rtlCol="0" anchor="ctr"/>
-          <a:lstStyle/>
-          <a:p>
-            <a:pPr algn="ctr"/>
-          </a:p>
-        </p:txBody>
-      </p:sp>
-      <p:sp>
-        <p:nvSpPr>
-          <p:cNvPr id="14" name="TextBox 13"/>
-          <p:cNvSpPr txBox="1"/>
-          <p:nvPr/>
-        </p:nvSpPr>
-        <p:spPr>
-          <a:xfrm>
-            <a:off x="6647688" y="1389888"/>
-            <a:ext cx="1737360" cy="530352"/>
-          </a:xfrm>
-          <a:prstGeom prst="rect">
-            <a:avLst/>
-          </a:prstGeom>
-          <a:noFill/>
-        </p:spPr>
-        <p:txBody>
-          <a:bodyPr wrap="square">
-            <a:spAutoFit/>
-          </a:bodyPr>
-          <a:lstStyle/>
-          <a:p>
-            <a:pPr algn="l"/>
-            <a:r>
-              <a:rPr sz="1200" b="1" i="0">
-                <a:solidFill>
-                  <a:srgbClr val="FFFFFF"/>
-                </a:solidFill>
-              </a:rPr>
-              <a:t>Status</a:t>
-            </a:r>
-          </a:p>
-        </p:txBody>
-      </p:sp>
-      <p:sp>
-        <p:nvSpPr>
-          <p:cNvPr id="15" name="Rectangle 14"/>
-          <p:cNvSpPr/>
-          <p:nvPr/>
-        </p:nvSpPr>
-        <p:spPr>
-          <a:xfrm>
-            <a:off x="274320" y="1828800"/>
-            <a:ext cx="4206240" cy="530352"/>
-          </a:xfrm>
-          <a:prstGeom prst="rect">
-            <a:avLst/>
-          </a:prstGeom>
-          <a:solidFill>
-            <a:srgbClr val="D6DCE4"/>
-          </a:solidFill>
-          <a:ln>
-            <a:noFill/>
-          </a:ln>
-        </p:spPr>
-        <p:style>
-          <a:lnRef idx="1">
-            <a:schemeClr val="accent1"/>
-          </a:lnRef>
-          <a:fillRef idx="3">
-            <a:schemeClr val="accent1"/>
-          </a:fillRef>
-          <a:effectRef idx="2">
-            <a:schemeClr val="accent1"/>
-          </a:effectRef>
-          <a:fontRef idx="minor">
-            <a:schemeClr val="lt1"/>
-          </a:fontRef>
-        </p:style>
-        <p:txBody>
-          <a:bodyPr rtlCol="0" anchor="ctr"/>
-          <a:lstStyle/>
-          <a:p>
-            <a:pPr algn="ctr"/>
-          </a:p>
-        </p:txBody>
-      </p:sp>
-      <p:sp>
-        <p:nvSpPr>
-          <p:cNvPr id="16" name="TextBox 15"/>
-          <p:cNvSpPr txBox="1"/>
-          <p:nvPr/>
-        </p:nvSpPr>
-        <p:spPr>
-          <a:xfrm>
-            <a:off x="338328" y="1901952"/>
-            <a:ext cx="4114800" cy="530352"/>
-          </a:xfrm>
-          <a:prstGeom prst="rect">
-            <a:avLst/>
-          </a:prstGeom>
-          <a:noFill/>
-        </p:spPr>
-        <p:txBody>
-          <a:bodyPr wrap="square">
-            <a:spAutoFit/>
-          </a:bodyPr>
-          <a:lstStyle/>
-          <a:p>
-            <a:pPr algn="l"/>
-            <a:r>
-              <a:rPr sz="1100" b="0" i="0">
+              <a:rPr sz="1000" b="0" i="0">
                 <a:solidFill>
                   <a:srgbClr val="000000"/>
                 </a:solidFill>
               </a:rPr>
-              <a:t>Phase 1: Literature Review &amp; Planning</a:t>
-            </a:r>
-          </a:p>
-        </p:txBody>
-      </p:sp>
-      <p:sp>
-        <p:nvSpPr>
-          <p:cNvPr id="17" name="Rectangle 16"/>
-          <p:cNvSpPr/>
-          <p:nvPr/>
-        </p:nvSpPr>
-        <p:spPr>
-          <a:xfrm>
-            <a:off x="4480560" y="1828800"/>
-            <a:ext cx="2103120" cy="530352"/>
-          </a:xfrm>
-          <a:prstGeom prst="rect">
-            <a:avLst/>
-          </a:prstGeom>
-          <a:solidFill>
-            <a:srgbClr val="D6DCE4"/>
-          </a:solidFill>
-          <a:ln>
-            <a:noFill/>
-          </a:ln>
-        </p:spPr>
-        <p:style>
-          <a:lnRef idx="1">
-            <a:schemeClr val="accent1"/>
-          </a:lnRef>
-          <a:fillRef idx="3">
-            <a:schemeClr val="accent1"/>
-          </a:fillRef>
-          <a:effectRef idx="2">
-            <a:schemeClr val="accent1"/>
-          </a:effectRef>
-          <a:fontRef idx="minor">
-            <a:schemeClr val="lt1"/>
-          </a:fontRef>
-        </p:style>
-        <p:txBody>
-          <a:bodyPr rtlCol="0" anchor="ctr"/>
-          <a:lstStyle/>
-          <a:p>
-            <a:pPr algn="ctr"/>
-          </a:p>
-        </p:txBody>
-      </p:sp>
-      <p:sp>
-        <p:nvSpPr>
-          <p:cNvPr id="18" name="TextBox 17"/>
-          <p:cNvSpPr txBox="1"/>
-          <p:nvPr/>
-        </p:nvSpPr>
-        <p:spPr>
-          <a:xfrm>
-            <a:off x="4544568" y="1901952"/>
-            <a:ext cx="2011680" cy="530352"/>
-          </a:xfrm>
-          <a:prstGeom prst="rect">
-            <a:avLst/>
-          </a:prstGeom>
-          <a:noFill/>
-        </p:spPr>
-        <p:txBody>
-          <a:bodyPr wrap="square">
-            <a:spAutoFit/>
-          </a:bodyPr>
-          <a:lstStyle/>
-          <a:p>
-            <a:pPr algn="l"/>
-            <a:r>
-              <a:rPr sz="1100" b="0" i="0">
-                <a:solidFill>
-                  <a:srgbClr val="000000"/>
-                </a:solidFill>
-              </a:rPr>
-              <a:t>Aug – Sep 2024</a:t>
-            </a:r>
-          </a:p>
-        </p:txBody>
-      </p:sp>
-      <p:sp>
-        <p:nvSpPr>
-          <p:cNvPr id="19" name="Rectangle 18"/>
-          <p:cNvSpPr/>
-          <p:nvPr/>
-        </p:nvSpPr>
-        <p:spPr>
-          <a:xfrm>
-            <a:off x="6583680" y="1828800"/>
-            <a:ext cx="1737360" cy="530352"/>
-          </a:xfrm>
-          <a:prstGeom prst="rect">
-            <a:avLst/>
-          </a:prstGeom>
-          <a:solidFill>
-            <a:srgbClr val="D6DCE4"/>
-          </a:solidFill>
-          <a:ln>
-            <a:noFill/>
-          </a:ln>
-        </p:spPr>
-        <p:style>
-          <a:lnRef idx="1">
-            <a:schemeClr val="accent1"/>
-          </a:lnRef>
-          <a:fillRef idx="3">
-            <a:schemeClr val="accent1"/>
-          </a:fillRef>
-          <a:effectRef idx="2">
-            <a:schemeClr val="accent1"/>
-          </a:effectRef>
-          <a:fontRef idx="minor">
-            <a:schemeClr val="lt1"/>
-          </a:fontRef>
-        </p:style>
-        <p:txBody>
-          <a:bodyPr rtlCol="0" anchor="ctr"/>
-          <a:lstStyle/>
-          <a:p>
-            <a:pPr algn="ctr"/>
-          </a:p>
-        </p:txBody>
-      </p:sp>
-      <p:sp>
-        <p:nvSpPr>
-          <p:cNvPr id="20" name="TextBox 19"/>
-          <p:cNvSpPr txBox="1"/>
-          <p:nvPr/>
-        </p:nvSpPr>
-        <p:spPr>
-          <a:xfrm>
-            <a:off x="6647688" y="1901952"/>
-            <a:ext cx="1645920" cy="530352"/>
-          </a:xfrm>
-          <a:prstGeom prst="rect">
-            <a:avLst/>
-          </a:prstGeom>
-          <a:noFill/>
-        </p:spPr>
-        <p:txBody>
-          <a:bodyPr wrap="square">
-            <a:spAutoFit/>
-          </a:bodyPr>
-          <a:lstStyle/>
-          <a:p>
-            <a:pPr algn="l"/>
-            <a:r>
-              <a:rPr sz="1100" b="1" i="0">
-                <a:solidFill>
-                  <a:srgbClr val="378610"/>
-                </a:solidFill>
-              </a:rPr>
-              <a:t>✔  Completed</a:t>
-            </a:r>
-          </a:p>
-        </p:txBody>
-      </p:sp>
-      <p:sp>
-        <p:nvSpPr>
-          <p:cNvPr id="21" name="Rectangle 20"/>
-          <p:cNvSpPr/>
-          <p:nvPr/>
-        </p:nvSpPr>
-        <p:spPr>
-          <a:xfrm>
-            <a:off x="274320" y="2359152"/>
-            <a:ext cx="4206240" cy="530352"/>
-          </a:xfrm>
-          <a:prstGeom prst="rect">
-            <a:avLst/>
-          </a:prstGeom>
-          <a:solidFill>
-            <a:srgbClr val="FFFFFF"/>
-          </a:solidFill>
-          <a:ln>
-            <a:noFill/>
-          </a:ln>
-        </p:spPr>
-        <p:style>
-          <a:lnRef idx="1">
-            <a:schemeClr val="accent1"/>
-          </a:lnRef>
-          <a:fillRef idx="3">
-            <a:schemeClr val="accent1"/>
-          </a:fillRef>
-          <a:effectRef idx="2">
-            <a:schemeClr val="accent1"/>
-          </a:effectRef>
-          <a:fontRef idx="minor">
-            <a:schemeClr val="lt1"/>
-          </a:fontRef>
-        </p:style>
-        <p:txBody>
-          <a:bodyPr rtlCol="0" anchor="ctr"/>
-          <a:lstStyle/>
-          <a:p>
-            <a:pPr algn="ctr"/>
-          </a:p>
-        </p:txBody>
-      </p:sp>
-      <p:sp>
-        <p:nvSpPr>
-          <p:cNvPr id="22" name="TextBox 21"/>
-          <p:cNvSpPr txBox="1"/>
-          <p:nvPr/>
-        </p:nvSpPr>
-        <p:spPr>
-          <a:xfrm>
-            <a:off x="338328" y="2432304"/>
-            <a:ext cx="4114800" cy="530352"/>
-          </a:xfrm>
-          <a:prstGeom prst="rect">
-            <a:avLst/>
-          </a:prstGeom>
-          <a:noFill/>
-        </p:spPr>
-        <p:txBody>
-          <a:bodyPr wrap="square">
-            <a:spAutoFit/>
-          </a:bodyPr>
-          <a:lstStyle/>
-          <a:p>
-            <a:pPr algn="l"/>
-            <a:r>
-              <a:rPr sz="1100" b="0" i="0">
-                <a:solidFill>
-                  <a:srgbClr val="000000"/>
-                </a:solidFill>
-              </a:rPr>
-              <a:t>Phase 2: System Design &amp; Architecture</a:t>
-            </a:r>
-          </a:p>
-        </p:txBody>
-      </p:sp>
-      <p:sp>
-        <p:nvSpPr>
-          <p:cNvPr id="23" name="Rectangle 22"/>
-          <p:cNvSpPr/>
-          <p:nvPr/>
-        </p:nvSpPr>
-        <p:spPr>
-          <a:xfrm>
-            <a:off x="4480560" y="2359152"/>
-            <a:ext cx="2103120" cy="530352"/>
-          </a:xfrm>
-          <a:prstGeom prst="rect">
-            <a:avLst/>
-          </a:prstGeom>
-          <a:solidFill>
-            <a:srgbClr val="FFFFFF"/>
-          </a:solidFill>
-          <a:ln>
-            <a:noFill/>
-          </a:ln>
-        </p:spPr>
-        <p:style>
-          <a:lnRef idx="1">
-            <a:schemeClr val="accent1"/>
-          </a:lnRef>
-          <a:fillRef idx="3">
-            <a:schemeClr val="accent1"/>
-          </a:fillRef>
-          <a:effectRef idx="2">
-            <a:schemeClr val="accent1"/>
-          </a:effectRef>
-          <a:fontRef idx="minor">
-            <a:schemeClr val="lt1"/>
-          </a:fontRef>
-        </p:style>
-        <p:txBody>
-          <a:bodyPr rtlCol="0" anchor="ctr"/>
-          <a:lstStyle/>
-          <a:p>
-            <a:pPr algn="ctr"/>
-          </a:p>
-        </p:txBody>
-      </p:sp>
-      <p:sp>
-        <p:nvSpPr>
-          <p:cNvPr id="24" name="TextBox 23"/>
-          <p:cNvSpPr txBox="1"/>
-          <p:nvPr/>
-        </p:nvSpPr>
-        <p:spPr>
-          <a:xfrm>
-            <a:off x="4544568" y="2432304"/>
-            <a:ext cx="2011680" cy="530352"/>
-          </a:xfrm>
-          <a:prstGeom prst="rect">
-            <a:avLst/>
-          </a:prstGeom>
-          <a:noFill/>
-        </p:spPr>
-        <p:txBody>
-          <a:bodyPr wrap="square">
-            <a:spAutoFit/>
-          </a:bodyPr>
-          <a:lstStyle/>
-          <a:p>
-            <a:pPr algn="l"/>
-            <a:r>
-              <a:rPr sz="1100" b="0" i="0">
-                <a:solidFill>
-                  <a:srgbClr val="000000"/>
-                </a:solidFill>
-              </a:rPr>
-              <a:t>Oct 2024</a:t>
-            </a:r>
-          </a:p>
-        </p:txBody>
-      </p:sp>
-      <p:sp>
-        <p:nvSpPr>
-          <p:cNvPr id="25" name="Rectangle 24"/>
-          <p:cNvSpPr/>
-          <p:nvPr/>
-        </p:nvSpPr>
-        <p:spPr>
-          <a:xfrm>
-            <a:off x="6583680" y="2359152"/>
-            <a:ext cx="1737360" cy="530352"/>
-          </a:xfrm>
-          <a:prstGeom prst="rect">
-            <a:avLst/>
-          </a:prstGeom>
-          <a:solidFill>
-            <a:srgbClr val="FFFFFF"/>
-          </a:solidFill>
-          <a:ln>
-            <a:noFill/>
-          </a:ln>
-        </p:spPr>
-        <p:style>
-          <a:lnRef idx="1">
-            <a:schemeClr val="accent1"/>
-          </a:lnRef>
-          <a:fillRef idx="3">
-            <a:schemeClr val="accent1"/>
-          </a:fillRef>
-          <a:effectRef idx="2">
-            <a:schemeClr val="accent1"/>
-          </a:effectRef>
-          <a:fontRef idx="minor">
-            <a:schemeClr val="lt1"/>
-          </a:fontRef>
-        </p:style>
-        <p:txBody>
-          <a:bodyPr rtlCol="0" anchor="ctr"/>
-          <a:lstStyle/>
-          <a:p>
-            <a:pPr algn="ctr"/>
-          </a:p>
-        </p:txBody>
-      </p:sp>
-      <p:sp>
-        <p:nvSpPr>
-          <p:cNvPr id="26" name="TextBox 25"/>
-          <p:cNvSpPr txBox="1"/>
-          <p:nvPr/>
-        </p:nvSpPr>
-        <p:spPr>
-          <a:xfrm>
-            <a:off x="6647688" y="2432304"/>
-            <a:ext cx="1645920" cy="530352"/>
-          </a:xfrm>
-          <a:prstGeom prst="rect">
-            <a:avLst/>
-          </a:prstGeom>
-          <a:noFill/>
-        </p:spPr>
-        <p:txBody>
-          <a:bodyPr wrap="square">
-            <a:spAutoFit/>
-          </a:bodyPr>
-          <a:lstStyle/>
-          <a:p>
-            <a:pPr algn="l"/>
-            <a:r>
-              <a:rPr sz="1100" b="1" i="0">
-                <a:solidFill>
-                  <a:srgbClr val="378610"/>
-                </a:solidFill>
-              </a:rPr>
-              <a:t>✔  Completed</a:t>
-            </a:r>
-          </a:p>
-        </p:txBody>
-      </p:sp>
-      <p:sp>
-        <p:nvSpPr>
-          <p:cNvPr id="27" name="Rectangle 26"/>
-          <p:cNvSpPr/>
-          <p:nvPr/>
-        </p:nvSpPr>
-        <p:spPr>
-          <a:xfrm>
-            <a:off x="274320" y="2889504"/>
-            <a:ext cx="4206240" cy="530352"/>
-          </a:xfrm>
-          <a:prstGeom prst="rect">
-            <a:avLst/>
-          </a:prstGeom>
-          <a:solidFill>
-            <a:srgbClr val="D6DCE4"/>
-          </a:solidFill>
-          <a:ln>
-            <a:noFill/>
-          </a:ln>
-        </p:spPr>
-        <p:style>
-          <a:lnRef idx="1">
-            <a:schemeClr val="accent1"/>
-          </a:lnRef>
-          <a:fillRef idx="3">
-            <a:schemeClr val="accent1"/>
-          </a:fillRef>
-          <a:effectRef idx="2">
-            <a:schemeClr val="accent1"/>
-          </a:effectRef>
-          <a:fontRef idx="minor">
-            <a:schemeClr val="lt1"/>
-          </a:fontRef>
-        </p:style>
-        <p:txBody>
-          <a:bodyPr rtlCol="0" anchor="ctr"/>
-          <a:lstStyle/>
-          <a:p>
-            <a:pPr algn="ctr"/>
-          </a:p>
-        </p:txBody>
-      </p:sp>
-      <p:sp>
-        <p:nvSpPr>
-          <p:cNvPr id="28" name="TextBox 27"/>
-          <p:cNvSpPr txBox="1"/>
-          <p:nvPr/>
-        </p:nvSpPr>
-        <p:spPr>
-          <a:xfrm>
-            <a:off x="338328" y="2962656"/>
-            <a:ext cx="4114800" cy="530352"/>
-          </a:xfrm>
-          <a:prstGeom prst="rect">
-            <a:avLst/>
-          </a:prstGeom>
-          <a:noFill/>
-        </p:spPr>
-        <p:txBody>
-          <a:bodyPr wrap="square">
-            <a:spAutoFit/>
-          </a:bodyPr>
-          <a:lstStyle/>
-          <a:p>
-            <a:pPr algn="l"/>
-            <a:r>
-              <a:rPr sz="1100" b="0" i="0">
-                <a:solidFill>
-                  <a:srgbClr val="000000"/>
-                </a:solidFill>
-              </a:rPr>
-              <a:t>Phase 3: Face Detection Module (YuNet CNN)</a:t>
-            </a:r>
-          </a:p>
-        </p:txBody>
-      </p:sp>
-      <p:sp>
-        <p:nvSpPr>
-          <p:cNvPr id="29" name="Rectangle 28"/>
-          <p:cNvSpPr/>
-          <p:nvPr/>
-        </p:nvSpPr>
-        <p:spPr>
-          <a:xfrm>
-            <a:off x="4480560" y="2889504"/>
-            <a:ext cx="2103120" cy="530352"/>
-          </a:xfrm>
-          <a:prstGeom prst="rect">
-            <a:avLst/>
-          </a:prstGeom>
-          <a:solidFill>
-            <a:srgbClr val="D6DCE4"/>
-          </a:solidFill>
-          <a:ln>
-            <a:noFill/>
-          </a:ln>
-        </p:spPr>
-        <p:style>
-          <a:lnRef idx="1">
-            <a:schemeClr val="accent1"/>
-          </a:lnRef>
-          <a:fillRef idx="3">
-            <a:schemeClr val="accent1"/>
-          </a:fillRef>
-          <a:effectRef idx="2">
-            <a:schemeClr val="accent1"/>
-          </a:effectRef>
-          <a:fontRef idx="minor">
-            <a:schemeClr val="lt1"/>
-          </a:fontRef>
-        </p:style>
-        <p:txBody>
-          <a:bodyPr rtlCol="0" anchor="ctr"/>
-          <a:lstStyle/>
-          <a:p>
-            <a:pPr algn="ctr"/>
-          </a:p>
-        </p:txBody>
-      </p:sp>
-      <p:sp>
-        <p:nvSpPr>
-          <p:cNvPr id="30" name="TextBox 29"/>
-          <p:cNvSpPr txBox="1"/>
-          <p:nvPr/>
-        </p:nvSpPr>
-        <p:spPr>
-          <a:xfrm>
-            <a:off x="4544568" y="2962656"/>
-            <a:ext cx="2011680" cy="530352"/>
-          </a:xfrm>
-          <a:prstGeom prst="rect">
-            <a:avLst/>
-          </a:prstGeom>
-          <a:noFill/>
-        </p:spPr>
-        <p:txBody>
-          <a:bodyPr wrap="square">
-            <a:spAutoFit/>
-          </a:bodyPr>
-          <a:lstStyle/>
-          <a:p>
-            <a:pPr algn="l"/>
-            <a:r>
-              <a:rPr sz="1100" b="0" i="0">
-                <a:solidFill>
-                  <a:srgbClr val="000000"/>
-                </a:solidFill>
-              </a:rPr>
-              <a:t>Nov 2024</a:t>
-            </a:r>
-          </a:p>
-        </p:txBody>
-      </p:sp>
-      <p:sp>
-        <p:nvSpPr>
-          <p:cNvPr id="31" name="Rectangle 30"/>
-          <p:cNvSpPr/>
-          <p:nvPr/>
-        </p:nvSpPr>
-        <p:spPr>
-          <a:xfrm>
-            <a:off x="6583680" y="2889504"/>
-            <a:ext cx="1737360" cy="530352"/>
-          </a:xfrm>
-          <a:prstGeom prst="rect">
-            <a:avLst/>
-          </a:prstGeom>
-          <a:solidFill>
-            <a:srgbClr val="D6DCE4"/>
-          </a:solidFill>
-          <a:ln>
-            <a:noFill/>
-          </a:ln>
-        </p:spPr>
-        <p:style>
-          <a:lnRef idx="1">
-            <a:schemeClr val="accent1"/>
-          </a:lnRef>
-          <a:fillRef idx="3">
-            <a:schemeClr val="accent1"/>
-          </a:fillRef>
-          <a:effectRef idx="2">
-            <a:schemeClr val="accent1"/>
-          </a:effectRef>
-          <a:fontRef idx="minor">
-            <a:schemeClr val="lt1"/>
-          </a:fontRef>
-        </p:style>
-        <p:txBody>
-          <a:bodyPr rtlCol="0" anchor="ctr"/>
-          <a:lstStyle/>
-          <a:p>
-            <a:pPr algn="ctr"/>
-          </a:p>
-        </p:txBody>
-      </p:sp>
-      <p:sp>
-        <p:nvSpPr>
-          <p:cNvPr id="32" name="TextBox 31"/>
-          <p:cNvSpPr txBox="1"/>
-          <p:nvPr/>
-        </p:nvSpPr>
-        <p:spPr>
-          <a:xfrm>
-            <a:off x="6647688" y="2962656"/>
-            <a:ext cx="1645920" cy="530352"/>
-          </a:xfrm>
-          <a:prstGeom prst="rect">
-            <a:avLst/>
-          </a:prstGeom>
-          <a:noFill/>
-        </p:spPr>
-        <p:txBody>
-          <a:bodyPr wrap="square">
-            <a:spAutoFit/>
-          </a:bodyPr>
-          <a:lstStyle/>
-          <a:p>
-            <a:pPr algn="l"/>
-            <a:r>
-              <a:rPr sz="1100" b="1" i="0">
-                <a:solidFill>
-                  <a:srgbClr val="378610"/>
-                </a:solidFill>
-              </a:rPr>
-              <a:t>✔  Completed</a:t>
-            </a:r>
-          </a:p>
-        </p:txBody>
-      </p:sp>
-      <p:sp>
-        <p:nvSpPr>
-          <p:cNvPr id="33" name="Rectangle 32"/>
-          <p:cNvSpPr/>
-          <p:nvPr/>
-        </p:nvSpPr>
-        <p:spPr>
-          <a:xfrm>
-            <a:off x="274320" y="3419856"/>
-            <a:ext cx="4206240" cy="530352"/>
-          </a:xfrm>
-          <a:prstGeom prst="rect">
-            <a:avLst/>
-          </a:prstGeom>
-          <a:solidFill>
-            <a:srgbClr val="FFFFFF"/>
-          </a:solidFill>
-          <a:ln>
-            <a:noFill/>
-          </a:ln>
-        </p:spPr>
-        <p:style>
-          <a:lnRef idx="1">
-            <a:schemeClr val="accent1"/>
-          </a:lnRef>
-          <a:fillRef idx="3">
-            <a:schemeClr val="accent1"/>
-          </a:fillRef>
-          <a:effectRef idx="2">
-            <a:schemeClr val="accent1"/>
-          </a:effectRef>
-          <a:fontRef idx="minor">
-            <a:schemeClr val="lt1"/>
-          </a:fontRef>
-        </p:style>
-        <p:txBody>
-          <a:bodyPr rtlCol="0" anchor="ctr"/>
-          <a:lstStyle/>
-          <a:p>
-            <a:pPr algn="ctr"/>
-          </a:p>
-        </p:txBody>
-      </p:sp>
-      <p:sp>
-        <p:nvSpPr>
-          <p:cNvPr id="34" name="TextBox 33"/>
-          <p:cNvSpPr txBox="1"/>
-          <p:nvPr/>
-        </p:nvSpPr>
-        <p:spPr>
-          <a:xfrm>
-            <a:off x="338328" y="3493008"/>
-            <a:ext cx="4114800" cy="530352"/>
-          </a:xfrm>
-          <a:prstGeom prst="rect">
-            <a:avLst/>
-          </a:prstGeom>
-          <a:noFill/>
-        </p:spPr>
-        <p:txBody>
-          <a:bodyPr wrap="square">
-            <a:spAutoFit/>
-          </a:bodyPr>
-          <a:lstStyle/>
-          <a:p>
-            <a:pPr algn="l"/>
-            <a:r>
-              <a:rPr sz="1100" b="0" i="0">
-                <a:solidFill>
-                  <a:srgbClr val="000000"/>
-                </a:solidFill>
-              </a:rPr>
-              <a:t>Phase 4: Face Recognition Module (SFace CNN)</a:t>
-            </a:r>
-          </a:p>
-        </p:txBody>
-      </p:sp>
-      <p:sp>
-        <p:nvSpPr>
-          <p:cNvPr id="35" name="Rectangle 34"/>
-          <p:cNvSpPr/>
-          <p:nvPr/>
-        </p:nvSpPr>
-        <p:spPr>
-          <a:xfrm>
-            <a:off x="4480560" y="3419856"/>
-            <a:ext cx="2103120" cy="530352"/>
-          </a:xfrm>
-          <a:prstGeom prst="rect">
-            <a:avLst/>
-          </a:prstGeom>
-          <a:solidFill>
-            <a:srgbClr val="FFFFFF"/>
-          </a:solidFill>
-          <a:ln>
-            <a:noFill/>
-          </a:ln>
-        </p:spPr>
-        <p:style>
-          <a:lnRef idx="1">
-            <a:schemeClr val="accent1"/>
-          </a:lnRef>
-          <a:fillRef idx="3">
-            <a:schemeClr val="accent1"/>
-          </a:fillRef>
-          <a:effectRef idx="2">
-            <a:schemeClr val="accent1"/>
-          </a:effectRef>
-          <a:fontRef idx="minor">
-            <a:schemeClr val="lt1"/>
-          </a:fontRef>
-        </p:style>
-        <p:txBody>
-          <a:bodyPr rtlCol="0" anchor="ctr"/>
-          <a:lstStyle/>
-          <a:p>
-            <a:pPr algn="ctr"/>
-          </a:p>
-        </p:txBody>
-      </p:sp>
-      <p:sp>
-        <p:nvSpPr>
-          <p:cNvPr id="36" name="TextBox 35"/>
-          <p:cNvSpPr txBox="1"/>
-          <p:nvPr/>
-        </p:nvSpPr>
-        <p:spPr>
-          <a:xfrm>
-            <a:off x="4544568" y="3493008"/>
-            <a:ext cx="2011680" cy="530352"/>
-          </a:xfrm>
-          <a:prstGeom prst="rect">
-            <a:avLst/>
-          </a:prstGeom>
-          <a:noFill/>
-        </p:spPr>
-        <p:txBody>
-          <a:bodyPr wrap="square">
-            <a:spAutoFit/>
-          </a:bodyPr>
-          <a:lstStyle/>
-          <a:p>
-            <a:pPr algn="l"/>
-            <a:r>
-              <a:rPr sz="1100" b="0" i="0">
-                <a:solidFill>
-                  <a:srgbClr val="000000"/>
-                </a:solidFill>
-              </a:rPr>
-              <a:t>Nov – Dec 2024</a:t>
-            </a:r>
-          </a:p>
-        </p:txBody>
-      </p:sp>
-      <p:sp>
-        <p:nvSpPr>
-          <p:cNvPr id="37" name="Rectangle 36"/>
-          <p:cNvSpPr/>
-          <p:nvPr/>
-        </p:nvSpPr>
-        <p:spPr>
-          <a:xfrm>
-            <a:off x="6583680" y="3419856"/>
-            <a:ext cx="1737360" cy="530352"/>
-          </a:xfrm>
-          <a:prstGeom prst="rect">
-            <a:avLst/>
-          </a:prstGeom>
-          <a:solidFill>
-            <a:srgbClr val="FFFFFF"/>
-          </a:solidFill>
-          <a:ln>
-            <a:noFill/>
-          </a:ln>
-        </p:spPr>
-        <p:style>
-          <a:lnRef idx="1">
-            <a:schemeClr val="accent1"/>
-          </a:lnRef>
-          <a:fillRef idx="3">
-            <a:schemeClr val="accent1"/>
-          </a:fillRef>
-          <a:effectRef idx="2">
-            <a:schemeClr val="accent1"/>
-          </a:effectRef>
-          <a:fontRef idx="minor">
-            <a:schemeClr val="lt1"/>
-          </a:fontRef>
-        </p:style>
-        <p:txBody>
-          <a:bodyPr rtlCol="0" anchor="ctr"/>
-          <a:lstStyle/>
-          <a:p>
-            <a:pPr algn="ctr"/>
-          </a:p>
-        </p:txBody>
-      </p:sp>
-      <p:sp>
-        <p:nvSpPr>
-          <p:cNvPr id="38" name="TextBox 37"/>
-          <p:cNvSpPr txBox="1"/>
-          <p:nvPr/>
-        </p:nvSpPr>
-        <p:spPr>
-          <a:xfrm>
-            <a:off x="6647688" y="3493008"/>
-            <a:ext cx="1645920" cy="530352"/>
-          </a:xfrm>
-          <a:prstGeom prst="rect">
-            <a:avLst/>
-          </a:prstGeom>
-          <a:noFill/>
-        </p:spPr>
-        <p:txBody>
-          <a:bodyPr wrap="square">
-            <a:spAutoFit/>
-          </a:bodyPr>
-          <a:lstStyle/>
-          <a:p>
-            <a:pPr algn="l"/>
-            <a:r>
-              <a:rPr sz="1100" b="1" i="0">
-                <a:solidFill>
-                  <a:srgbClr val="378610"/>
-                </a:solidFill>
-              </a:rPr>
-              <a:t>✔  Completed</a:t>
-            </a:r>
-          </a:p>
-        </p:txBody>
-      </p:sp>
-      <p:sp>
-        <p:nvSpPr>
-          <p:cNvPr id="39" name="Rectangle 38"/>
-          <p:cNvSpPr/>
-          <p:nvPr/>
-        </p:nvSpPr>
-        <p:spPr>
-          <a:xfrm>
-            <a:off x="274320" y="3950208"/>
-            <a:ext cx="4206240" cy="530352"/>
-          </a:xfrm>
-          <a:prstGeom prst="rect">
-            <a:avLst/>
-          </a:prstGeom>
-          <a:solidFill>
-            <a:srgbClr val="D6DCE4"/>
-          </a:solidFill>
-          <a:ln>
-            <a:noFill/>
-          </a:ln>
-        </p:spPr>
-        <p:style>
-          <a:lnRef idx="1">
-            <a:schemeClr val="accent1"/>
-          </a:lnRef>
-          <a:fillRef idx="3">
-            <a:schemeClr val="accent1"/>
-          </a:fillRef>
-          <a:effectRef idx="2">
-            <a:schemeClr val="accent1"/>
-          </a:effectRef>
-          <a:fontRef idx="minor">
-            <a:schemeClr val="lt1"/>
-          </a:fontRef>
-        </p:style>
-        <p:txBody>
-          <a:bodyPr rtlCol="0" anchor="ctr"/>
-          <a:lstStyle/>
-          <a:p>
-            <a:pPr algn="ctr"/>
-          </a:p>
-        </p:txBody>
-      </p:sp>
-      <p:sp>
-        <p:nvSpPr>
-          <p:cNvPr id="40" name="TextBox 39"/>
-          <p:cNvSpPr txBox="1"/>
-          <p:nvPr/>
-        </p:nvSpPr>
-        <p:spPr>
-          <a:xfrm>
-            <a:off x="338328" y="4023360"/>
-            <a:ext cx="4114800" cy="530352"/>
-          </a:xfrm>
-          <a:prstGeom prst="rect">
-            <a:avLst/>
-          </a:prstGeom>
-          <a:noFill/>
-        </p:spPr>
-        <p:txBody>
-          <a:bodyPr wrap="square">
-            <a:spAutoFit/>
-          </a:bodyPr>
-          <a:lstStyle/>
-          <a:p>
-            <a:pPr algn="l"/>
-            <a:r>
-              <a:rPr sz="1100" b="0" i="0">
-                <a:solidFill>
-                  <a:srgbClr val="000000"/>
-                </a:solidFill>
-              </a:rPr>
-              <a:t>Phase 5: Gait Detection Module (MOG2)</a:t>
-            </a:r>
-          </a:p>
-        </p:txBody>
-      </p:sp>
-      <p:sp>
-        <p:nvSpPr>
-          <p:cNvPr id="41" name="Rectangle 40"/>
-          <p:cNvSpPr/>
-          <p:nvPr/>
-        </p:nvSpPr>
-        <p:spPr>
-          <a:xfrm>
-            <a:off x="4480560" y="3950208"/>
-            <a:ext cx="2103120" cy="530352"/>
-          </a:xfrm>
-          <a:prstGeom prst="rect">
-            <a:avLst/>
-          </a:prstGeom>
-          <a:solidFill>
-            <a:srgbClr val="D6DCE4"/>
-          </a:solidFill>
-          <a:ln>
-            <a:noFill/>
-          </a:ln>
-        </p:spPr>
-        <p:style>
-          <a:lnRef idx="1">
-            <a:schemeClr val="accent1"/>
-          </a:lnRef>
-          <a:fillRef idx="3">
-            <a:schemeClr val="accent1"/>
-          </a:fillRef>
-          <a:effectRef idx="2">
-            <a:schemeClr val="accent1"/>
-          </a:effectRef>
-          <a:fontRef idx="minor">
-            <a:schemeClr val="lt1"/>
-          </a:fontRef>
-        </p:style>
-        <p:txBody>
-          <a:bodyPr rtlCol="0" anchor="ctr"/>
-          <a:lstStyle/>
-          <a:p>
-            <a:pPr algn="ctr"/>
-          </a:p>
-        </p:txBody>
-      </p:sp>
-      <p:sp>
-        <p:nvSpPr>
-          <p:cNvPr id="42" name="TextBox 41"/>
-          <p:cNvSpPr txBox="1"/>
-          <p:nvPr/>
-        </p:nvSpPr>
-        <p:spPr>
-          <a:xfrm>
-            <a:off x="4544568" y="4023360"/>
-            <a:ext cx="2011680" cy="530352"/>
-          </a:xfrm>
-          <a:prstGeom prst="rect">
-            <a:avLst/>
-          </a:prstGeom>
-          <a:noFill/>
-        </p:spPr>
-        <p:txBody>
-          <a:bodyPr wrap="square">
-            <a:spAutoFit/>
-          </a:bodyPr>
-          <a:lstStyle/>
-          <a:p>
-            <a:pPr algn="l"/>
-            <a:r>
-              <a:rPr sz="1100" b="0" i="0">
-                <a:solidFill>
-                  <a:srgbClr val="000000"/>
-                </a:solidFill>
-              </a:rPr>
-              <a:t>Dec 2024</a:t>
-            </a:r>
-          </a:p>
-        </p:txBody>
-      </p:sp>
-      <p:sp>
-        <p:nvSpPr>
-          <p:cNvPr id="43" name="Rectangle 42"/>
-          <p:cNvSpPr/>
-          <p:nvPr/>
-        </p:nvSpPr>
-        <p:spPr>
-          <a:xfrm>
-            <a:off x="6583680" y="3950208"/>
-            <a:ext cx="1737360" cy="530352"/>
-          </a:xfrm>
-          <a:prstGeom prst="rect">
-            <a:avLst/>
-          </a:prstGeom>
-          <a:solidFill>
-            <a:srgbClr val="D6DCE4"/>
-          </a:solidFill>
-          <a:ln>
-            <a:noFill/>
-          </a:ln>
-        </p:spPr>
-        <p:style>
-          <a:lnRef idx="1">
-            <a:schemeClr val="accent1"/>
-          </a:lnRef>
-          <a:fillRef idx="3">
-            <a:schemeClr val="accent1"/>
-          </a:fillRef>
-          <a:effectRef idx="2">
-            <a:schemeClr val="accent1"/>
-          </a:effectRef>
-          <a:fontRef idx="minor">
-            <a:schemeClr val="lt1"/>
-          </a:fontRef>
-        </p:style>
-        <p:txBody>
-          <a:bodyPr rtlCol="0" anchor="ctr"/>
-          <a:lstStyle/>
-          <a:p>
-            <a:pPr algn="ctr"/>
-          </a:p>
-        </p:txBody>
-      </p:sp>
-      <p:sp>
-        <p:nvSpPr>
-          <p:cNvPr id="44" name="TextBox 43"/>
-          <p:cNvSpPr txBox="1"/>
-          <p:nvPr/>
-        </p:nvSpPr>
-        <p:spPr>
-          <a:xfrm>
-            <a:off x="6647688" y="4023360"/>
-            <a:ext cx="1645920" cy="530352"/>
-          </a:xfrm>
-          <a:prstGeom prst="rect">
-            <a:avLst/>
-          </a:prstGeom>
-          <a:noFill/>
-        </p:spPr>
-        <p:txBody>
-          <a:bodyPr wrap="square">
-            <a:spAutoFit/>
-          </a:bodyPr>
-          <a:lstStyle/>
-          <a:p>
-            <a:pPr algn="l"/>
-            <a:r>
-              <a:rPr sz="1100" b="1" i="0">
-                <a:solidFill>
-                  <a:srgbClr val="378610"/>
-                </a:solidFill>
-              </a:rPr>
-              <a:t>✔  Completed</a:t>
-            </a:r>
-          </a:p>
-        </p:txBody>
-      </p:sp>
-      <p:sp>
-        <p:nvSpPr>
-          <p:cNvPr id="45" name="Rectangle 44"/>
-          <p:cNvSpPr/>
-          <p:nvPr/>
-        </p:nvSpPr>
-        <p:spPr>
-          <a:xfrm>
-            <a:off x="274320" y="4480560"/>
-            <a:ext cx="4206240" cy="530352"/>
-          </a:xfrm>
-          <a:prstGeom prst="rect">
-            <a:avLst/>
-          </a:prstGeom>
-          <a:solidFill>
-            <a:srgbClr val="FFFFFF"/>
-          </a:solidFill>
-          <a:ln>
-            <a:noFill/>
-          </a:ln>
-        </p:spPr>
-        <p:style>
-          <a:lnRef idx="1">
-            <a:schemeClr val="accent1"/>
-          </a:lnRef>
-          <a:fillRef idx="3">
-            <a:schemeClr val="accent1"/>
-          </a:fillRef>
-          <a:effectRef idx="2">
-            <a:schemeClr val="accent1"/>
-          </a:effectRef>
-          <a:fontRef idx="minor">
-            <a:schemeClr val="lt1"/>
-          </a:fontRef>
-        </p:style>
-        <p:txBody>
-          <a:bodyPr rtlCol="0" anchor="ctr"/>
-          <a:lstStyle/>
-          <a:p>
-            <a:pPr algn="ctr"/>
-          </a:p>
-        </p:txBody>
-      </p:sp>
-      <p:sp>
-        <p:nvSpPr>
-          <p:cNvPr id="46" name="TextBox 45"/>
-          <p:cNvSpPr txBox="1"/>
-          <p:nvPr/>
-        </p:nvSpPr>
-        <p:spPr>
-          <a:xfrm>
-            <a:off x="338328" y="4553712"/>
-            <a:ext cx="4114800" cy="530352"/>
-          </a:xfrm>
-          <a:prstGeom prst="rect">
-            <a:avLst/>
-          </a:prstGeom>
-          <a:noFill/>
-        </p:spPr>
-        <p:txBody>
-          <a:bodyPr wrap="square">
-            <a:spAutoFit/>
-          </a:bodyPr>
-          <a:lstStyle/>
-          <a:p>
-            <a:pPr algn="l"/>
-            <a:r>
-              <a:rPr sz="1100" b="0" i="0">
-                <a:solidFill>
-                  <a:srgbClr val="000000"/>
-                </a:solidFill>
-              </a:rPr>
-              <a:t>Phase 6: GUI Integration &amp; Testing</a:t>
-            </a:r>
-          </a:p>
-        </p:txBody>
-      </p:sp>
-      <p:sp>
-        <p:nvSpPr>
-          <p:cNvPr id="47" name="Rectangle 46"/>
-          <p:cNvSpPr/>
-          <p:nvPr/>
-        </p:nvSpPr>
-        <p:spPr>
-          <a:xfrm>
-            <a:off x="4480560" y="4480560"/>
-            <a:ext cx="2103120" cy="530352"/>
-          </a:xfrm>
-          <a:prstGeom prst="rect">
-            <a:avLst/>
-          </a:prstGeom>
-          <a:solidFill>
-            <a:srgbClr val="FFFFFF"/>
-          </a:solidFill>
-          <a:ln>
-            <a:noFill/>
-          </a:ln>
-        </p:spPr>
-        <p:style>
-          <a:lnRef idx="1">
-            <a:schemeClr val="accent1"/>
-          </a:lnRef>
-          <a:fillRef idx="3">
-            <a:schemeClr val="accent1"/>
-          </a:fillRef>
-          <a:effectRef idx="2">
-            <a:schemeClr val="accent1"/>
-          </a:effectRef>
-          <a:fontRef idx="minor">
-            <a:schemeClr val="lt1"/>
-          </a:fontRef>
-        </p:style>
-        <p:txBody>
-          <a:bodyPr rtlCol="0" anchor="ctr"/>
-          <a:lstStyle/>
-          <a:p>
-            <a:pPr algn="ctr"/>
-          </a:p>
-        </p:txBody>
-      </p:sp>
-      <p:sp>
-        <p:nvSpPr>
-          <p:cNvPr id="48" name="TextBox 47"/>
-          <p:cNvSpPr txBox="1"/>
-          <p:nvPr/>
-        </p:nvSpPr>
-        <p:spPr>
-          <a:xfrm>
-            <a:off x="4544568" y="4553712"/>
-            <a:ext cx="2011680" cy="530352"/>
-          </a:xfrm>
-          <a:prstGeom prst="rect">
-            <a:avLst/>
-          </a:prstGeom>
-          <a:noFill/>
-        </p:spPr>
-        <p:txBody>
-          <a:bodyPr wrap="square">
-            <a:spAutoFit/>
-          </a:bodyPr>
-          <a:lstStyle/>
-          <a:p>
-            <a:pPr algn="l"/>
-            <a:r>
-              <a:rPr sz="1100" b="0" i="0">
-                <a:solidFill>
-                  <a:srgbClr val="000000"/>
-                </a:solidFill>
-              </a:rPr>
-              <a:t>Jan 2025</a:t>
-            </a:r>
-          </a:p>
-        </p:txBody>
-      </p:sp>
-      <p:sp>
-        <p:nvSpPr>
-          <p:cNvPr id="49" name="Rectangle 48"/>
-          <p:cNvSpPr/>
-          <p:nvPr/>
-        </p:nvSpPr>
-        <p:spPr>
-          <a:xfrm>
-            <a:off x="6583680" y="4480560"/>
-            <a:ext cx="1737360" cy="530352"/>
-          </a:xfrm>
-          <a:prstGeom prst="rect">
-            <a:avLst/>
-          </a:prstGeom>
-          <a:solidFill>
-            <a:srgbClr val="FFFFFF"/>
-          </a:solidFill>
-          <a:ln>
-            <a:noFill/>
-          </a:ln>
-        </p:spPr>
-        <p:style>
-          <a:lnRef idx="1">
-            <a:schemeClr val="accent1"/>
-          </a:lnRef>
-          <a:fillRef idx="3">
-            <a:schemeClr val="accent1"/>
-          </a:fillRef>
-          <a:effectRef idx="2">
-            <a:schemeClr val="accent1"/>
-          </a:effectRef>
-          <a:fontRef idx="minor">
-            <a:schemeClr val="lt1"/>
-          </a:fontRef>
-        </p:style>
-        <p:txBody>
-          <a:bodyPr rtlCol="0" anchor="ctr"/>
-          <a:lstStyle/>
-          <a:p>
-            <a:pPr algn="ctr"/>
-          </a:p>
-        </p:txBody>
-      </p:sp>
-      <p:sp>
-        <p:nvSpPr>
-          <p:cNvPr id="50" name="TextBox 49"/>
-          <p:cNvSpPr txBox="1"/>
-          <p:nvPr/>
-        </p:nvSpPr>
-        <p:spPr>
-          <a:xfrm>
-            <a:off x="6647688" y="4553712"/>
-            <a:ext cx="1645920" cy="530352"/>
-          </a:xfrm>
-          <a:prstGeom prst="rect">
-            <a:avLst/>
-          </a:prstGeom>
-          <a:noFill/>
-        </p:spPr>
-        <p:txBody>
-          <a:bodyPr wrap="square">
-            <a:spAutoFit/>
-          </a:bodyPr>
-          <a:lstStyle/>
-          <a:p>
-            <a:pPr algn="l"/>
-            <a:r>
-              <a:rPr sz="1100" b="1" i="0">
-                <a:solidFill>
-                  <a:srgbClr val="378610"/>
-                </a:solidFill>
-              </a:rPr>
-              <a:t>✔  Completed</a:t>
-            </a:r>
-          </a:p>
-        </p:txBody>
-      </p:sp>
-      <p:sp>
-        <p:nvSpPr>
-          <p:cNvPr id="51" name="Rectangle 50"/>
-          <p:cNvSpPr/>
-          <p:nvPr/>
-        </p:nvSpPr>
-        <p:spPr>
-          <a:xfrm>
-            <a:off x="274320" y="5010912"/>
-            <a:ext cx="4206240" cy="530352"/>
-          </a:xfrm>
-          <a:prstGeom prst="rect">
-            <a:avLst/>
-          </a:prstGeom>
-          <a:solidFill>
-            <a:srgbClr val="D6DCE4"/>
-          </a:solidFill>
-          <a:ln>
-            <a:noFill/>
-          </a:ln>
-        </p:spPr>
-        <p:style>
-          <a:lnRef idx="1">
-            <a:schemeClr val="accent1"/>
-          </a:lnRef>
-          <a:fillRef idx="3">
-            <a:schemeClr val="accent1"/>
-          </a:fillRef>
-          <a:effectRef idx="2">
-            <a:schemeClr val="accent1"/>
-          </a:effectRef>
-          <a:fontRef idx="minor">
-            <a:schemeClr val="lt1"/>
-          </a:fontRef>
-        </p:style>
-        <p:txBody>
-          <a:bodyPr rtlCol="0" anchor="ctr"/>
-          <a:lstStyle/>
-          <a:p>
-            <a:pPr algn="ctr"/>
-          </a:p>
-        </p:txBody>
-      </p:sp>
-      <p:sp>
-        <p:nvSpPr>
-          <p:cNvPr id="52" name="TextBox 51"/>
-          <p:cNvSpPr txBox="1"/>
-          <p:nvPr/>
-        </p:nvSpPr>
-        <p:spPr>
-          <a:xfrm>
-            <a:off x="338328" y="5084064"/>
-            <a:ext cx="4114800" cy="530352"/>
-          </a:xfrm>
-          <a:prstGeom prst="rect">
-            <a:avLst/>
-          </a:prstGeom>
-          <a:noFill/>
-        </p:spPr>
-        <p:txBody>
-          <a:bodyPr wrap="square">
-            <a:spAutoFit/>
-          </a:bodyPr>
-          <a:lstStyle/>
-          <a:p>
-            <a:pPr algn="l"/>
-            <a:r>
-              <a:rPr sz="1100" b="0" i="0">
-                <a:solidFill>
-                  <a:srgbClr val="000000"/>
-                </a:solidFill>
-              </a:rPr>
-              <a:t>Phase 7: Accuracy Measurement &amp; Evaluation</a:t>
-            </a:r>
-          </a:p>
-        </p:txBody>
-      </p:sp>
-      <p:sp>
-        <p:nvSpPr>
-          <p:cNvPr id="53" name="Rectangle 52"/>
-          <p:cNvSpPr/>
-          <p:nvPr/>
-        </p:nvSpPr>
-        <p:spPr>
-          <a:xfrm>
-            <a:off x="4480560" y="5010912"/>
-            <a:ext cx="2103120" cy="530352"/>
-          </a:xfrm>
-          <a:prstGeom prst="rect">
-            <a:avLst/>
-          </a:prstGeom>
-          <a:solidFill>
-            <a:srgbClr val="D6DCE4"/>
-          </a:solidFill>
-          <a:ln>
-            <a:noFill/>
-          </a:ln>
-        </p:spPr>
-        <p:style>
-          <a:lnRef idx="1">
-            <a:schemeClr val="accent1"/>
-          </a:lnRef>
-          <a:fillRef idx="3">
-            <a:schemeClr val="accent1"/>
-          </a:fillRef>
-          <a:effectRef idx="2">
-            <a:schemeClr val="accent1"/>
-          </a:effectRef>
-          <a:fontRef idx="minor">
-            <a:schemeClr val="lt1"/>
-          </a:fontRef>
-        </p:style>
-        <p:txBody>
-          <a:bodyPr rtlCol="0" anchor="ctr"/>
-          <a:lstStyle/>
-          <a:p>
-            <a:pPr algn="ctr"/>
-          </a:p>
-        </p:txBody>
-      </p:sp>
-      <p:sp>
-        <p:nvSpPr>
-          <p:cNvPr id="54" name="TextBox 53"/>
-          <p:cNvSpPr txBox="1"/>
-          <p:nvPr/>
-        </p:nvSpPr>
-        <p:spPr>
-          <a:xfrm>
-            <a:off x="4544568" y="5084064"/>
-            <a:ext cx="2011680" cy="530352"/>
-          </a:xfrm>
-          <a:prstGeom prst="rect">
-            <a:avLst/>
-          </a:prstGeom>
-          <a:noFill/>
-        </p:spPr>
-        <p:txBody>
-          <a:bodyPr wrap="square">
-            <a:spAutoFit/>
-          </a:bodyPr>
-          <a:lstStyle/>
-          <a:p>
-            <a:pPr algn="l"/>
-            <a:r>
-              <a:rPr sz="1100" b="0" i="0">
-                <a:solidFill>
-                  <a:srgbClr val="000000"/>
-                </a:solidFill>
-              </a:rPr>
-              <a:t>Feb 2025</a:t>
-            </a:r>
-          </a:p>
-        </p:txBody>
-      </p:sp>
-      <p:sp>
-        <p:nvSpPr>
-          <p:cNvPr id="55" name="Rectangle 54"/>
-          <p:cNvSpPr/>
-          <p:nvPr/>
-        </p:nvSpPr>
-        <p:spPr>
-          <a:xfrm>
-            <a:off x="6583680" y="5010912"/>
-            <a:ext cx="1737360" cy="530352"/>
-          </a:xfrm>
-          <a:prstGeom prst="rect">
-            <a:avLst/>
-          </a:prstGeom>
-          <a:solidFill>
-            <a:srgbClr val="D6DCE4"/>
-          </a:solidFill>
-          <a:ln>
-            <a:noFill/>
-          </a:ln>
-        </p:spPr>
-        <p:style>
-          <a:lnRef idx="1">
-            <a:schemeClr val="accent1"/>
-          </a:lnRef>
-          <a:fillRef idx="3">
-            <a:schemeClr val="accent1"/>
-          </a:fillRef>
-          <a:effectRef idx="2">
-            <a:schemeClr val="accent1"/>
-          </a:effectRef>
-          <a:fontRef idx="minor">
-            <a:schemeClr val="lt1"/>
-          </a:fontRef>
-        </p:style>
-        <p:txBody>
-          <a:bodyPr rtlCol="0" anchor="ctr"/>
-          <a:lstStyle/>
-          <a:p>
-            <a:pPr algn="ctr"/>
-          </a:p>
-        </p:txBody>
-      </p:sp>
-      <p:sp>
-        <p:nvSpPr>
-          <p:cNvPr id="56" name="TextBox 55"/>
-          <p:cNvSpPr txBox="1"/>
-          <p:nvPr/>
-        </p:nvSpPr>
-        <p:spPr>
-          <a:xfrm>
-            <a:off x="6647688" y="5084064"/>
-            <a:ext cx="1645920" cy="530352"/>
-          </a:xfrm>
-          <a:prstGeom prst="rect">
-            <a:avLst/>
-          </a:prstGeom>
-          <a:noFill/>
-        </p:spPr>
-        <p:txBody>
-          <a:bodyPr wrap="square">
-            <a:spAutoFit/>
-          </a:bodyPr>
-          <a:lstStyle/>
-          <a:p>
-            <a:pPr algn="l"/>
-            <a:r>
-              <a:rPr sz="1100" b="1" i="0">
-                <a:solidFill>
-                  <a:srgbClr val="378610"/>
-                </a:solidFill>
-              </a:rPr>
-              <a:t>✔  Completed</a:t>
-            </a:r>
-          </a:p>
-        </p:txBody>
-      </p:sp>
-      <p:sp>
-        <p:nvSpPr>
-          <p:cNvPr id="57" name="Rectangle 56"/>
-          <p:cNvSpPr/>
-          <p:nvPr/>
-        </p:nvSpPr>
-        <p:spPr>
-          <a:xfrm>
-            <a:off x="274320" y="5541264"/>
-            <a:ext cx="4206240" cy="530352"/>
-          </a:xfrm>
-          <a:prstGeom prst="rect">
-            <a:avLst/>
-          </a:prstGeom>
-          <a:solidFill>
-            <a:srgbClr val="FFFFFF"/>
-          </a:solidFill>
-          <a:ln>
-            <a:noFill/>
-          </a:ln>
-        </p:spPr>
-        <p:style>
-          <a:lnRef idx="1">
-            <a:schemeClr val="accent1"/>
-          </a:lnRef>
-          <a:fillRef idx="3">
-            <a:schemeClr val="accent1"/>
-          </a:fillRef>
-          <a:effectRef idx="2">
-            <a:schemeClr val="accent1"/>
-          </a:effectRef>
-          <a:fontRef idx="minor">
-            <a:schemeClr val="lt1"/>
-          </a:fontRef>
-        </p:style>
-        <p:txBody>
-          <a:bodyPr rtlCol="0" anchor="ctr"/>
-          <a:lstStyle/>
-          <a:p>
-            <a:pPr algn="ctr"/>
-          </a:p>
-        </p:txBody>
-      </p:sp>
-      <p:sp>
-        <p:nvSpPr>
-          <p:cNvPr id="58" name="TextBox 57"/>
-          <p:cNvSpPr txBox="1"/>
-          <p:nvPr/>
-        </p:nvSpPr>
-        <p:spPr>
-          <a:xfrm>
-            <a:off x="338328" y="5614416"/>
-            <a:ext cx="4114800" cy="530352"/>
-          </a:xfrm>
-          <a:prstGeom prst="rect">
-            <a:avLst/>
-          </a:prstGeom>
-          <a:noFill/>
-        </p:spPr>
-        <p:txBody>
-          <a:bodyPr wrap="square">
-            <a:spAutoFit/>
-          </a:bodyPr>
-          <a:lstStyle/>
-          <a:p>
-            <a:pPr algn="l"/>
-            <a:r>
-              <a:rPr sz="1100" b="0" i="0">
-                <a:solidFill>
-                  <a:srgbClr val="000000"/>
-                </a:solidFill>
-              </a:rPr>
-              <a:t>Phase 8: Report Writing &amp; Presentation</a:t>
-            </a:r>
-          </a:p>
-        </p:txBody>
-      </p:sp>
-      <p:sp>
-        <p:nvSpPr>
-          <p:cNvPr id="59" name="Rectangle 58"/>
-          <p:cNvSpPr/>
-          <p:nvPr/>
-        </p:nvSpPr>
-        <p:spPr>
-          <a:xfrm>
-            <a:off x="4480560" y="5541264"/>
-            <a:ext cx="2103120" cy="530352"/>
-          </a:xfrm>
-          <a:prstGeom prst="rect">
-            <a:avLst/>
-          </a:prstGeom>
-          <a:solidFill>
-            <a:srgbClr val="FFFFFF"/>
-          </a:solidFill>
-          <a:ln>
-            <a:noFill/>
-          </a:ln>
-        </p:spPr>
-        <p:style>
-          <a:lnRef idx="1">
-            <a:schemeClr val="accent1"/>
-          </a:lnRef>
-          <a:fillRef idx="3">
-            <a:schemeClr val="accent1"/>
-          </a:fillRef>
-          <a:effectRef idx="2">
-            <a:schemeClr val="accent1"/>
-          </a:effectRef>
-          <a:fontRef idx="minor">
-            <a:schemeClr val="lt1"/>
-          </a:fontRef>
-        </p:style>
-        <p:txBody>
-          <a:bodyPr rtlCol="0" anchor="ctr"/>
-          <a:lstStyle/>
-          <a:p>
-            <a:pPr algn="ctr"/>
-          </a:p>
-        </p:txBody>
-      </p:sp>
-      <p:sp>
-        <p:nvSpPr>
-          <p:cNvPr id="60" name="TextBox 59"/>
-          <p:cNvSpPr txBox="1"/>
-          <p:nvPr/>
-        </p:nvSpPr>
-        <p:spPr>
-          <a:xfrm>
-            <a:off x="4544568" y="5614416"/>
-            <a:ext cx="2011680" cy="530352"/>
-          </a:xfrm>
-          <a:prstGeom prst="rect">
-            <a:avLst/>
-          </a:prstGeom>
-          <a:noFill/>
-        </p:spPr>
-        <p:txBody>
-          <a:bodyPr wrap="square">
-            <a:spAutoFit/>
-          </a:bodyPr>
-          <a:lstStyle/>
-          <a:p>
-            <a:pPr algn="l"/>
-            <a:r>
-              <a:rPr sz="1100" b="0" i="0">
-                <a:solidFill>
-                  <a:srgbClr val="000000"/>
-                </a:solidFill>
-              </a:rPr>
-              <a:t>Mar 2025</a:t>
-            </a:r>
-          </a:p>
-        </p:txBody>
-      </p:sp>
-      <p:sp>
-        <p:nvSpPr>
-          <p:cNvPr id="61" name="Rectangle 60"/>
-          <p:cNvSpPr/>
-          <p:nvPr/>
-        </p:nvSpPr>
-        <p:spPr>
-          <a:xfrm>
-            <a:off x="6583680" y="5541264"/>
-            <a:ext cx="1737360" cy="530352"/>
-          </a:xfrm>
-          <a:prstGeom prst="rect">
-            <a:avLst/>
-          </a:prstGeom>
-          <a:solidFill>
-            <a:srgbClr val="FFFFFF"/>
-          </a:solidFill>
-          <a:ln>
-            <a:noFill/>
-          </a:ln>
-        </p:spPr>
-        <p:style>
-          <a:lnRef idx="1">
-            <a:schemeClr val="accent1"/>
-          </a:lnRef>
-          <a:fillRef idx="3">
-            <a:schemeClr val="accent1"/>
-          </a:fillRef>
-          <a:effectRef idx="2">
-            <a:schemeClr val="accent1"/>
-          </a:effectRef>
-          <a:fontRef idx="minor">
-            <a:schemeClr val="lt1"/>
-          </a:fontRef>
-        </p:style>
-        <p:txBody>
-          <a:bodyPr rtlCol="0" anchor="ctr"/>
-          <a:lstStyle/>
-          <a:p>
-            <a:pPr algn="ctr"/>
-          </a:p>
-        </p:txBody>
-      </p:sp>
-      <p:sp>
-        <p:nvSpPr>
-          <p:cNvPr id="62" name="TextBox 61"/>
-          <p:cNvSpPr txBox="1"/>
-          <p:nvPr/>
-        </p:nvSpPr>
-        <p:spPr>
-          <a:xfrm>
-            <a:off x="6647688" y="5614416"/>
-            <a:ext cx="1645920" cy="530352"/>
-          </a:xfrm>
-          <a:prstGeom prst="rect">
-            <a:avLst/>
-          </a:prstGeom>
-          <a:noFill/>
-        </p:spPr>
-        <p:txBody>
-          <a:bodyPr wrap="square">
-            <a:spAutoFit/>
-          </a:bodyPr>
-          <a:lstStyle/>
-          <a:p>
-            <a:pPr algn="l"/>
-            <a:r>
-              <a:rPr sz="1100" b="1" i="0">
-                <a:solidFill>
-                  <a:srgbClr val="C00000"/>
-                </a:solidFill>
-              </a:rPr>
-              <a:t>⬜  Pending</a:t>
+              <a:t>Actual Progress</a:t>
             </a:r>
           </a:p>
         </p:txBody>
